--- a/PowerPoints_machine_learning/00_Cours_Complet_Python_IA.pptx
+++ b/PowerPoints_machine_learning/00_Cours_Complet_Python_IA.pptx
@@ -48,9 +48,13 @@
     <p:sldId id="296" r:id="rId42"/>
     <p:sldId id="297" r:id="rId43"/>
     <p:sldId id="298" r:id="rId44"/>
+    <p:sldId id="299" r:id="rId45"/>
+    <p:sldId id="300" r:id="rId46"/>
+    <p:sldId id="301" r:id="rId47"/>
+    <p:sldId id="302" r:id="rId48"/>
   </p:sldIdLst>
   <p:notesMasterIdLst>
-    <p:notesMasterId r:id="rId45"/>
+    <p:notesMasterId r:id="rId49"/>
   </p:notesMasterIdLst>
   <p:sldSz cx="9144000" cy="5143500"/>
   <p:notesSz cx="5143500" cy="9144000"/>
@@ -3262,6 +3266,313 @@
 </c:chartSpace>
 </file>
 
+<file path=ppt/charts/chart9.xml><?xml version="1.0" encoding="utf-8"?>
+<c:chartSpace xmlns:c="http://schemas.openxmlformats.org/drawingml/2006/chart" xmlns:a="http://schemas.openxmlformats.org/drawingml/2006/main" xmlns:r="http://schemas.openxmlformats.org/officeDocument/2006/relationships">
+  <c:date1904 val="0"/>
+  <c:roundedCorners val="1"/>
+  <c:chart>
+    <c:title>
+      <c:tx>
+        <c:rich>
+          <a:bodyPr/>
+          <a:lstStyle/>
+          <a:p>
+            <a:pPr>
+              <a:defRPr sz="1100" b="0" i="0" u="none" strike="noStrike">
+                <a:solidFill>
+                  <a:srgbClr val="1E2761"/>
+                </a:solidFill>
+                <a:latin typeface="Arial"/>
+              </a:defRPr>
+            </a:pPr>
+            <a:r>
+              <a:rPr sz="1100" b="0" i="0" u="none" strike="noStrike">
+                <a:solidFill>
+                  <a:srgbClr val="1E2761"/>
+                </a:solidFill>
+                <a:latin typeface="Arial"/>
+              </a:rPr>
+              <a:t>200 epochs sur un réseau de 13 paramètres</a:t>
+            </a:r>
+          </a:p>
+        </c:rich>
+      </c:tx>
+      <c:layout/>
+      <c:overlay val="0"/>
+    </c:title>
+    <c:autoTitleDeleted val="0"/>
+    <c:plotArea>
+      <c:layout/>
+      <c:barChart>
+        <c:barDir val="col"/>
+        <c:grouping val="clustered"/>
+        <c:varyColors val="0"/>
+        <c:ser>
+          <c:idx val="0"/>
+          <c:order val="0"/>
+          <c:tx>
+            <c:strRef>
+              <c:f>Sheet1!$B$1</c:f>
+              <c:strCache>
+                <c:ptCount val="1"/>
+                <c:pt idx="0">
+                  <c:v>Temps (ms)</c:v>
+                </c:pt>
+              </c:strCache>
+            </c:strRef>
+          </c:tx>
+          <c:spPr>
+            <a:solidFill>
+              <a:srgbClr val="02C39A"/>
+            </a:solidFill>
+            <a:effectLst/>
+          </c:spPr>
+          <c:invertIfNegative val="0"/>
+          <c:dLbls>
+            <c:numFmt formatCode="#,##0" sourceLinked="0"/>
+            <c:txPr>
+              <a:bodyPr/>
+              <a:lstStyle/>
+              <a:p>
+                <a:pPr>
+                  <a:defRPr b="0" i="0" strike="noStrike" sz="1000" u="none">
+                    <a:solidFill>
+                      <a:srgbClr val="1E2761"/>
+                    </a:solidFill>
+                    <a:latin typeface="Arial"/>
+                  </a:defRPr>
+                </a:pPr>
+              </a:p>
+            </c:txPr>
+            <c:showLegendKey val="0"/>
+            <c:showVal val="1"/>
+            <c:showCatName val="0"/>
+            <c:showSerName val="0"/>
+            <c:showPercent val="0"/>
+            <c:showBubbleSize val="0"/>
+            <c:showLeaderLines val="0"/>
+          </c:dLbls>
+          <c:dPt>
+            <c:idx val="0"/>
+            <c:invertIfNegative val="0"/>
+            <c:bubble3D val="0"/>
+            <c:spPr>
+              <a:solidFill>
+                <a:srgbClr val="02C39A"/>
+              </a:solidFill>
+              <a:effectLst/>
+            </c:spPr>
+          </c:dPt>
+          <c:dPt>
+            <c:idx val="1"/>
+            <c:invertIfNegative val="0"/>
+            <c:bubble3D val="0"/>
+            <c:spPr>
+              <a:solidFill>
+                <a:srgbClr val="02C39A"/>
+              </a:solidFill>
+              <a:effectLst/>
+            </c:spPr>
+          </c:dPt>
+          <c:dPt>
+            <c:idx val="2"/>
+            <c:invertIfNegative val="0"/>
+            <c:bubble3D val="0"/>
+            <c:spPr>
+              <a:solidFill>
+                <a:srgbClr val="D64550"/>
+              </a:solidFill>
+              <a:effectLst/>
+            </c:spPr>
+          </c:dPt>
+          <c:cat>
+            <c:multiLvlStrRef>
+              <c:f>Sheet1!$A$2:$A$4</c:f>
+              <c:multiLvlStrCache>
+                <c:ptCount val="3"/>
+                <c:lvl>
+                  <c:pt idx="0">
+                    <c:v>CPU
+(noyau global)</c:v>
+                  </c:pt>
+                  <c:pt idx="1">
+                    <c:v>CPU
+(noyau ROCm)</c:v>
+                  </c:pt>
+                  <c:pt idx="2">
+                    <c:v>GPU
+(Radeon 880M)</c:v>
+                  </c:pt>
+                </c:lvl>
+              </c:multiLvlStrCache>
+            </c:multiLvlStrRef>
+          </c:cat>
+          <c:val>
+            <c:numRef>
+              <c:f>Sheet1!$B$2:$B$4</c:f>
+              <c:numCache>
+                <c:formatCode>General</c:formatCode>
+                <c:ptCount val="3"/>
+                <c:pt idx="0">
+                  <c:v>111</c:v>
+                </c:pt>
+                <c:pt idx="1">
+                  <c:v>72</c:v>
+                </c:pt>
+                <c:pt idx="2">
+                  <c:v>478</c:v>
+                </c:pt>
+              </c:numCache>
+            </c:numRef>
+          </c:val>
+        </c:ser>
+        <c:dLbls>
+          <c:numFmt formatCode="#,##0" sourceLinked="0"/>
+          <c:txPr>
+            <a:bodyPr/>
+            <a:lstStyle/>
+            <a:p>
+              <a:pPr>
+                <a:defRPr b="0" i="0" strike="noStrike" sz="1000" u="none">
+                  <a:solidFill>
+                    <a:srgbClr val="1E2761"/>
+                  </a:solidFill>
+                  <a:latin typeface="Arial"/>
+                </a:defRPr>
+              </a:pPr>
+            </a:p>
+          </c:txPr>
+          <c:showLegendKey val="0"/>
+          <c:showVal val="1"/>
+          <c:showCatName val="0"/>
+          <c:showSerName val="0"/>
+          <c:showPercent val="0"/>
+          <c:showBubbleSize val="0"/>
+          <c:showLeaderLines val="0"/>
+        </c:dLbls>
+        <c:gapWidth val="150"/>
+        <c:overlap val="0"/>
+        <c:axId val="2094734554"/>
+        <c:axId val="2094734552"/>
+        <c:axId val="2094734556"/>
+      </c:barChart>
+      <c:catAx>
+        <c:axId val="2094734554"/>
+        <c:scaling>
+          <c:orientation val="minMax"/>
+        </c:scaling>
+        <c:delete val="0"/>
+        <c:axPos val="b"/>
+        <c:numFmt formatCode="General" sourceLinked="1"/>
+        <c:majorTickMark val="out"/>
+        <c:minorTickMark val="none"/>
+        <c:tickLblPos val="low"/>
+        <c:spPr>
+          <a:ln w="12700" cap="flat">
+            <a:solidFill>
+              <a:srgbClr val="888888"/>
+            </a:solidFill>
+            <a:prstDash val="solid"/>
+            <a:round/>
+          </a:ln>
+        </c:spPr>
+        <c:txPr>
+          <a:bodyPr/>
+          <a:lstStyle/>
+          <a:p>
+            <a:pPr>
+              <a:defRPr sz="850" b="0" i="0" u="none" strike="noStrike">
+                <a:solidFill>
+                  <a:srgbClr val="5A6B8C"/>
+                </a:solidFill>
+                <a:latin typeface="Arial"/>
+              </a:defRPr>
+            </a:pPr>
+            <a:endParaRPr lang="en-US"/>
+          </a:p>
+        </c:txPr>
+        <c:crossAx val="2094734552"/>
+        <c:crosses val="autoZero"/>
+        <c:auto val="1"/>
+        <c:lblAlgn val="ctr"/>
+        <c:noMultiLvlLbl val="1"/>
+      </c:catAx>
+      <c:valAx>
+        <c:axId val="2094734552"/>
+        <c:scaling>
+          <c:orientation val="minMax"/>
+        </c:scaling>
+        <c:delete val="0"/>
+        <c:axPos val="l"/>
+        <c:majorGridlines>
+          <c:spPr>
+            <a:ln w="6350" cap="flat">
+              <a:solidFill>
+                <a:srgbClr val="E4EAF5"/>
+              </a:solidFill>
+              <a:prstDash val="solid"/>
+              <a:round/>
+            </a:ln>
+          </c:spPr>
+        </c:majorGridlines>
+        <c:numFmt formatCode="General" sourceLinked="0"/>
+        <c:majorTickMark val="out"/>
+        <c:minorTickMark val="none"/>
+        <c:tickLblPos val="nextTo"/>
+        <c:spPr>
+          <a:ln w="12700" cap="flat">
+            <a:solidFill>
+              <a:srgbClr val="888888"/>
+            </a:solidFill>
+            <a:prstDash val="solid"/>
+            <a:round/>
+          </a:ln>
+        </c:spPr>
+        <c:txPr>
+          <a:bodyPr/>
+          <a:lstStyle/>
+          <a:p>
+            <a:pPr>
+              <a:defRPr sz="900" b="0" i="0" u="none" strike="noStrike">
+                <a:solidFill>
+                  <a:srgbClr val="5A6B8C"/>
+                </a:solidFill>
+                <a:latin typeface="Arial"/>
+              </a:defRPr>
+            </a:pPr>
+            <a:endParaRPr lang="en-US"/>
+          </a:p>
+        </c:txPr>
+        <c:crossAx val="2094734554"/>
+        <c:crosses val="autoZero"/>
+        <c:crossBetween val="between"/>
+      </c:valAx>
+      <c:spPr>
+        <a:noFill/>
+        <a:ln>
+          <a:noFill/>
+        </a:ln>
+        <a:effectLst/>
+      </c:spPr>
+    </c:plotArea>
+    <c:plotVisOnly val="1"/>
+    <c:dispBlanksAs val="span"/>
+  </c:chart>
+  <c:spPr>
+    <a:solidFill>
+      <a:srgbClr val="FFFFFF"/>
+    </a:solidFill>
+    <a:ln>
+      <a:noFill/>
+    </a:ln>
+    <a:effectLst/>
+  </c:spPr>
+  <c:externalData r:id="rId1">
+    <c:autoUpdate val="0"/>
+  </c:externalData>
+</c:chartSpace>
+</file>
+
 <file path=ppt/notesMasters/notesMaster1.xml><?xml version="1.0" encoding="utf-8"?>
 <p:notesMaster xmlns:a="http://schemas.openxmlformats.org/drawingml/2006/main" xmlns:r="http://schemas.openxmlformats.org/officeDocument/2006/relationships" xmlns:p="http://schemas.openxmlformats.org/presentationml/2006/main">
   <p:cSld>
@@ -6937,6 +7248,358 @@
             <a:fld id="{F7021451-1387-4CA6-816F-3879F97B5CBC}" type="slidenum">
               <a:rPr lang="en-US"/>
               <a:t>43</a:t>
+            </a:fld>
+            <a:endParaRPr lang="en-US"/>
+          </a:p>
+        </p:txBody>
+      </p:sp>
+    </p:spTree>
+    <p:extLst>
+      <p:ext uri="{BB962C8B-B14F-4D97-AF65-F5344CB8AC3E}">
+        <p14:creationId xmlns:p14="http://schemas.microsoft.com/office/powerpoint/2010/main" val="1024086991"/>
+      </p:ext>
+    </p:extLst>
+  </p:cSld>
+  <p:clrMapOvr>
+    <a:masterClrMapping/>
+  </p:clrMapOvr>
+</p:notes>
+</file>
+
+<file path=ppt/notesSlides/notesSlide44.xml><?xml version="1.0" encoding="utf-8"?>
+<p:notes xmlns:a="http://schemas.openxmlformats.org/drawingml/2006/main" xmlns:r="http://schemas.openxmlformats.org/officeDocument/2006/relationships" xmlns:p="http://schemas.openxmlformats.org/presentationml/2006/main">
+  <p:cSld>
+    <p:spTree>
+      <p:nvGrpSpPr>
+        <p:cNvPr id="1" name=""/>
+        <p:cNvGrpSpPr/>
+        <p:nvPr/>
+      </p:nvGrpSpPr>
+      <p:grpSpPr>
+        <a:xfrm>
+          <a:off x="0" y="0"/>
+          <a:ext cx="0" cy="0"/>
+          <a:chOff x="0" y="0"/>
+          <a:chExt cx="0" cy="0"/>
+        </a:xfrm>
+      </p:grpSpPr>
+      <p:sp>
+        <p:nvSpPr>
+          <p:cNvPr id="2" name="Slide Image Placeholder 1"/>
+          <p:cNvSpPr>
+            <a:spLocks noGrp="1" noRot="1" noChangeAspect="1"/>
+          </p:cNvSpPr>
+          <p:nvPr>
+            <p:ph type="sldImg"/>
+          </p:nvPr>
+        </p:nvSpPr>
+        <p:spPr/>
+      </p:sp>
+      <p:sp>
+        <p:nvSpPr>
+          <p:cNvPr id="3" name="Notes Placeholder 2"/>
+          <p:cNvSpPr>
+            <a:spLocks noGrp="1"/>
+          </p:cNvSpPr>
+          <p:nvPr>
+            <p:ph type="body" idx="1"/>
+          </p:nvPr>
+        </p:nvSpPr>
+        <p:spPr/>
+        <p:txBody>
+          <a:bodyPr/>
+          <a:lstStyle/>
+          <a:p>
+            <a:r>
+              <a:rPr lang="en-US" dirty="0"/>
+              <a:t/>
+            </a:r>
+            <a:endParaRPr lang="en-US" dirty="0"/>
+          </a:p>
+        </p:txBody>
+      </p:sp>
+      <p:sp>
+        <p:nvSpPr>
+          <p:cNvPr id="4" name="Slide Number Placeholder 3"/>
+          <p:cNvSpPr>
+            <a:spLocks noGrp="1"/>
+          </p:cNvSpPr>
+          <p:nvPr>
+            <p:ph type="sldNum" sz="quarter" idx="10"/>
+          </p:nvPr>
+        </p:nvSpPr>
+        <p:spPr/>
+        <p:txBody>
+          <a:bodyPr/>
+          <a:lstStyle/>
+          <a:p>
+            <a:fld id="{F7021451-1387-4CA6-816F-3879F97B5CBC}" type="slidenum">
+              <a:rPr lang="en-US"/>
+              <a:t>44</a:t>
+            </a:fld>
+            <a:endParaRPr lang="en-US"/>
+          </a:p>
+        </p:txBody>
+      </p:sp>
+    </p:spTree>
+    <p:extLst>
+      <p:ext uri="{BB962C8B-B14F-4D97-AF65-F5344CB8AC3E}">
+        <p14:creationId xmlns:p14="http://schemas.microsoft.com/office/powerpoint/2010/main" val="1024086991"/>
+      </p:ext>
+    </p:extLst>
+  </p:cSld>
+  <p:clrMapOvr>
+    <a:masterClrMapping/>
+  </p:clrMapOvr>
+</p:notes>
+</file>
+
+<file path=ppt/notesSlides/notesSlide45.xml><?xml version="1.0" encoding="utf-8"?>
+<p:notes xmlns:a="http://schemas.openxmlformats.org/drawingml/2006/main" xmlns:r="http://schemas.openxmlformats.org/officeDocument/2006/relationships" xmlns:p="http://schemas.openxmlformats.org/presentationml/2006/main">
+  <p:cSld>
+    <p:spTree>
+      <p:nvGrpSpPr>
+        <p:cNvPr id="1" name=""/>
+        <p:cNvGrpSpPr/>
+        <p:nvPr/>
+      </p:nvGrpSpPr>
+      <p:grpSpPr>
+        <a:xfrm>
+          <a:off x="0" y="0"/>
+          <a:ext cx="0" cy="0"/>
+          <a:chOff x="0" y="0"/>
+          <a:chExt cx="0" cy="0"/>
+        </a:xfrm>
+      </p:grpSpPr>
+      <p:sp>
+        <p:nvSpPr>
+          <p:cNvPr id="2" name="Slide Image Placeholder 1"/>
+          <p:cNvSpPr>
+            <a:spLocks noGrp="1" noRot="1" noChangeAspect="1"/>
+          </p:cNvSpPr>
+          <p:nvPr>
+            <p:ph type="sldImg"/>
+          </p:nvPr>
+        </p:nvSpPr>
+        <p:spPr/>
+      </p:sp>
+      <p:sp>
+        <p:nvSpPr>
+          <p:cNvPr id="3" name="Notes Placeholder 2"/>
+          <p:cNvSpPr>
+            <a:spLocks noGrp="1"/>
+          </p:cNvSpPr>
+          <p:nvPr>
+            <p:ph type="body" idx="1"/>
+          </p:nvPr>
+        </p:nvSpPr>
+        <p:spPr/>
+        <p:txBody>
+          <a:bodyPr/>
+          <a:lstStyle/>
+          <a:p>
+            <a:r>
+              <a:rPr lang="en-US" dirty="0"/>
+              <a:t/>
+            </a:r>
+            <a:endParaRPr lang="en-US" dirty="0"/>
+          </a:p>
+        </p:txBody>
+      </p:sp>
+      <p:sp>
+        <p:nvSpPr>
+          <p:cNvPr id="4" name="Slide Number Placeholder 3"/>
+          <p:cNvSpPr>
+            <a:spLocks noGrp="1"/>
+          </p:cNvSpPr>
+          <p:nvPr>
+            <p:ph type="sldNum" sz="quarter" idx="10"/>
+          </p:nvPr>
+        </p:nvSpPr>
+        <p:spPr/>
+        <p:txBody>
+          <a:bodyPr/>
+          <a:lstStyle/>
+          <a:p>
+            <a:fld id="{F7021451-1387-4CA6-816F-3879F97B5CBC}" type="slidenum">
+              <a:rPr lang="en-US"/>
+              <a:t>45</a:t>
+            </a:fld>
+            <a:endParaRPr lang="en-US"/>
+          </a:p>
+        </p:txBody>
+      </p:sp>
+    </p:spTree>
+    <p:extLst>
+      <p:ext uri="{BB962C8B-B14F-4D97-AF65-F5344CB8AC3E}">
+        <p14:creationId xmlns:p14="http://schemas.microsoft.com/office/powerpoint/2010/main" val="1024086991"/>
+      </p:ext>
+    </p:extLst>
+  </p:cSld>
+  <p:clrMapOvr>
+    <a:masterClrMapping/>
+  </p:clrMapOvr>
+</p:notes>
+</file>
+
+<file path=ppt/notesSlides/notesSlide46.xml><?xml version="1.0" encoding="utf-8"?>
+<p:notes xmlns:a="http://schemas.openxmlformats.org/drawingml/2006/main" xmlns:r="http://schemas.openxmlformats.org/officeDocument/2006/relationships" xmlns:p="http://schemas.openxmlformats.org/presentationml/2006/main">
+  <p:cSld>
+    <p:spTree>
+      <p:nvGrpSpPr>
+        <p:cNvPr id="1" name=""/>
+        <p:cNvGrpSpPr/>
+        <p:nvPr/>
+      </p:nvGrpSpPr>
+      <p:grpSpPr>
+        <a:xfrm>
+          <a:off x="0" y="0"/>
+          <a:ext cx="0" cy="0"/>
+          <a:chOff x="0" y="0"/>
+          <a:chExt cx="0" cy="0"/>
+        </a:xfrm>
+      </p:grpSpPr>
+      <p:sp>
+        <p:nvSpPr>
+          <p:cNvPr id="2" name="Slide Image Placeholder 1"/>
+          <p:cNvSpPr>
+            <a:spLocks noGrp="1" noRot="1" noChangeAspect="1"/>
+          </p:cNvSpPr>
+          <p:nvPr>
+            <p:ph type="sldImg"/>
+          </p:nvPr>
+        </p:nvSpPr>
+        <p:spPr/>
+      </p:sp>
+      <p:sp>
+        <p:nvSpPr>
+          <p:cNvPr id="3" name="Notes Placeholder 2"/>
+          <p:cNvSpPr>
+            <a:spLocks noGrp="1"/>
+          </p:cNvSpPr>
+          <p:nvPr>
+            <p:ph type="body" idx="1"/>
+          </p:nvPr>
+        </p:nvSpPr>
+        <p:spPr/>
+        <p:txBody>
+          <a:bodyPr/>
+          <a:lstStyle/>
+          <a:p>
+            <a:r>
+              <a:rPr lang="en-US" dirty="0"/>
+              <a:t/>
+            </a:r>
+            <a:endParaRPr lang="en-US" dirty="0"/>
+          </a:p>
+        </p:txBody>
+      </p:sp>
+      <p:sp>
+        <p:nvSpPr>
+          <p:cNvPr id="4" name="Slide Number Placeholder 3"/>
+          <p:cNvSpPr>
+            <a:spLocks noGrp="1"/>
+          </p:cNvSpPr>
+          <p:nvPr>
+            <p:ph type="sldNum" sz="quarter" idx="10"/>
+          </p:nvPr>
+        </p:nvSpPr>
+        <p:spPr/>
+        <p:txBody>
+          <a:bodyPr/>
+          <a:lstStyle/>
+          <a:p>
+            <a:fld id="{F7021451-1387-4CA6-816F-3879F97B5CBC}" type="slidenum">
+              <a:rPr lang="en-US"/>
+              <a:t>46</a:t>
+            </a:fld>
+            <a:endParaRPr lang="en-US"/>
+          </a:p>
+        </p:txBody>
+      </p:sp>
+    </p:spTree>
+    <p:extLst>
+      <p:ext uri="{BB962C8B-B14F-4D97-AF65-F5344CB8AC3E}">
+        <p14:creationId xmlns:p14="http://schemas.microsoft.com/office/powerpoint/2010/main" val="1024086991"/>
+      </p:ext>
+    </p:extLst>
+  </p:cSld>
+  <p:clrMapOvr>
+    <a:masterClrMapping/>
+  </p:clrMapOvr>
+</p:notes>
+</file>
+
+<file path=ppt/notesSlides/notesSlide47.xml><?xml version="1.0" encoding="utf-8"?>
+<p:notes xmlns:a="http://schemas.openxmlformats.org/drawingml/2006/main" xmlns:r="http://schemas.openxmlformats.org/officeDocument/2006/relationships" xmlns:p="http://schemas.openxmlformats.org/presentationml/2006/main">
+  <p:cSld>
+    <p:spTree>
+      <p:nvGrpSpPr>
+        <p:cNvPr id="1" name=""/>
+        <p:cNvGrpSpPr/>
+        <p:nvPr/>
+      </p:nvGrpSpPr>
+      <p:grpSpPr>
+        <a:xfrm>
+          <a:off x="0" y="0"/>
+          <a:ext cx="0" cy="0"/>
+          <a:chOff x="0" y="0"/>
+          <a:chExt cx="0" cy="0"/>
+        </a:xfrm>
+      </p:grpSpPr>
+      <p:sp>
+        <p:nvSpPr>
+          <p:cNvPr id="2" name="Slide Image Placeholder 1"/>
+          <p:cNvSpPr>
+            <a:spLocks noGrp="1" noRot="1" noChangeAspect="1"/>
+          </p:cNvSpPr>
+          <p:nvPr>
+            <p:ph type="sldImg"/>
+          </p:nvPr>
+        </p:nvSpPr>
+        <p:spPr/>
+      </p:sp>
+      <p:sp>
+        <p:nvSpPr>
+          <p:cNvPr id="3" name="Notes Placeholder 2"/>
+          <p:cNvSpPr>
+            <a:spLocks noGrp="1"/>
+          </p:cNvSpPr>
+          <p:nvPr>
+            <p:ph type="body" idx="1"/>
+          </p:nvPr>
+        </p:nvSpPr>
+        <p:spPr/>
+        <p:txBody>
+          <a:bodyPr/>
+          <a:lstStyle/>
+          <a:p>
+            <a:r>
+              <a:rPr lang="en-US" dirty="0"/>
+              <a:t/>
+            </a:r>
+            <a:endParaRPr lang="en-US" dirty="0"/>
+          </a:p>
+        </p:txBody>
+      </p:sp>
+      <p:sp>
+        <p:nvSpPr>
+          <p:cNvPr id="4" name="Slide Number Placeholder 3"/>
+          <p:cNvSpPr>
+            <a:spLocks noGrp="1"/>
+          </p:cNvSpPr>
+          <p:nvPr>
+            <p:ph type="sldNum" sz="quarter" idx="10"/>
+          </p:nvPr>
+        </p:nvSpPr>
+        <p:spPr/>
+        <p:txBody>
+          <a:bodyPr/>
+          <a:lstStyle/>
+          <a:p>
+            <a:fld id="{F7021451-1387-4CA6-816F-3879F97B5CBC}" type="slidenum">
+              <a:rPr lang="en-US"/>
+              <a:t>47</a:t>
             </a:fld>
             <a:endParaRPr lang="en-US"/>
           </a:p>
@@ -8302,7 +8965,7 @@
                 <a:ea typeface="Calibri" pitchFamily="34" charset="-122"/>
                 <a:cs typeface="Calibri" pitchFamily="34" charset="-120"/>
               </a:rPr>
-              <a:t>Machine Learning (S1 → S8).</a:t>
+              <a:t>Machine Learning (S1 → S9) et le Deep Learning.</a:t>
             </a:r>
             <a:endParaRPr lang="en-US" sz="1350" dirty="0"/>
           </a:p>
@@ -8341,7 +9004,7 @@
                 <a:ea typeface="Calibri" pitchFamily="34" charset="-122"/>
                 <a:cs typeface="Calibri" pitchFamily="34" charset="-120"/>
               </a:rPr>
-              <a:t>12 notebooks</a:t>
+              <a:t>3 parties</a:t>
             </a:r>
             <a:pPr indent="0" marL="0">
               <a:buNone/>
@@ -21651,6 +22314,58 @@
               </a:rPr>
               <a:t>— clustering : KMeans, DBSCAN, PCA &amp; t-SNE</a:t>
             </a:r>
+            <a:pPr indent="0" marL="0">
+              <a:lnSpc>
+                <a:spcPct val="135000"/>
+              </a:lnSpc>
+              <a:buNone/>
+            </a:pPr>
+            <a:r>
+              <a:rPr lang="en-US" sz="1150" dirty="0">
+                <a:solidFill>
+                  <a:srgbClr val="2A3550"/>
+                </a:solidFill>
+                <a:latin typeface="Calibri" pitchFamily="34" charset="0"/>
+                <a:ea typeface="Calibri" pitchFamily="34" charset="-122"/>
+                <a:cs typeface="Calibri" pitchFamily="34" charset="-120"/>
+              </a:rPr>
+              <a:t>
+</a:t>
+            </a:r>
+            <a:pPr indent="0" marL="0">
+              <a:lnSpc>
+                <a:spcPct val="135000"/>
+              </a:lnSpc>
+              <a:buNone/>
+            </a:pPr>
+            <a:r>
+              <a:rPr lang="en-US" sz="1150" b="1" dirty="0">
+                <a:solidFill>
+                  <a:srgbClr val="1E2761"/>
+                </a:solidFill>
+                <a:latin typeface="Calibri" pitchFamily="34" charset="0"/>
+                <a:ea typeface="Calibri" pitchFamily="34" charset="-122"/>
+                <a:cs typeface="Calibri" pitchFamily="34" charset="-120"/>
+              </a:rPr>
+              <a:t>S9 </a:t>
+            </a:r>
+            <a:pPr indent="0" marL="0">
+              <a:lnSpc>
+                <a:spcPct val="135000"/>
+              </a:lnSpc>
+              <a:buNone/>
+            </a:pPr>
+            <a:r>
+              <a:rPr lang="en-US" sz="1150" dirty="0">
+                <a:solidFill>
+                  <a:srgbClr val="2A3550"/>
+                </a:solidFill>
+                <a:latin typeface="Calibri" pitchFamily="34" charset="0"/>
+                <a:ea typeface="Calibri" pitchFamily="34" charset="-122"/>
+                <a:cs typeface="Calibri" pitchFamily="34" charset="-120"/>
+              </a:rPr>
+              <a:t>— non supervisé réel + DEEP LEARNING (PyTorch)</a:t>
+            </a:r>
             <a:endParaRPr lang="en-US" sz="1150" dirty="0"/>
           </a:p>
         </p:txBody>
@@ -22530,7 +23245,7 @@
                 <a:ea typeface="Calibri" pitchFamily="34" charset="-122"/>
                 <a:cs typeface="Calibri" pitchFamily="34" charset="-120"/>
               </a:rPr>
-              <a:t>KNN, arbres de décision, forêts — les notebooks S1 à S8 du dossier Cours_IA.</a:t>
+              <a:t>KNN, arbres de décision, forêts — les notebooks S1 à S9 du dossier Machine_learning.</a:t>
             </a:r>
             <a:endParaRPr lang="en-US" sz="1350" dirty="0"/>
           </a:p>
@@ -40288,7 +41003,7 @@
                 <a:ea typeface="Calibri" pitchFamily="34" charset="-122"/>
                 <a:cs typeface="Calibri" pitchFamily="34" charset="-120"/>
               </a:rPr>
-              <a:t>LE MUR DE LA HONTE (ON A TOUS FAIT CES ERREURS)</a:t>
+              <a:t>S9_P1 · LE CLUSTERING SUR LE RISQUE DE CRÉDIT</a:t>
             </a:r>
             <a:endParaRPr lang="en-US" sz="1100" dirty="0"/>
           </a:p>
@@ -40327,7 +41042,7 @@
                 <a:ea typeface="Calibri" pitchFamily="34" charset="-122"/>
                 <a:cs typeface="Calibri" pitchFamily="34" charset="-120"/>
               </a:rPr>
-              <a:t>Les 8 pièges célèbres du cours 🏆</a:t>
+              <a:t>S9 : le non supervisé face au monde réel</a:t>
             </a:r>
             <a:endParaRPr lang="en-US" sz="2700" dirty="0"/>
           </a:p>
@@ -40342,11 +41057,11 @@
         <p:spPr>
           <a:xfrm>
             <a:off x="457200" y="1188720"/>
-            <a:ext cx="4041648" cy="804672"/>
+            <a:ext cx="4206240" cy="1417320"/>
           </a:xfrm>
           <a:prstGeom prst="roundRect">
             <a:avLst>
-              <a:gd name="adj" fmla="val 6818"/>
+              <a:gd name="adj" fmla="val 3871"/>
             </a:avLst>
           </a:prstGeom>
           <a:solidFill>
@@ -40364,23 +41079,42 @@
       </p:sp>
       <p:sp>
         <p:nvSpPr>
-          <p:cNvPr id="5" name="Shape 3"/>
-          <p:cNvSpPr/>
-          <p:nvPr/>
-        </p:nvSpPr>
-        <p:spPr>
-          <a:xfrm>
-            <a:off x="566928" y="1426464"/>
-            <a:ext cx="329184" cy="329184"/>
-          </a:xfrm>
-          <a:prstGeom prst="ellipse">
-            <a:avLst/>
-          </a:prstGeom>
-          <a:solidFill>
-            <a:srgbClr val="D64550"/>
-          </a:solidFill>
-          <a:ln/>
-        </p:spPr>
+          <p:cNvPr id="5" name="Text 3"/>
+          <p:cNvSpPr/>
+          <p:nvPr/>
+        </p:nvSpPr>
+        <p:spPr>
+          <a:xfrm>
+            <a:off x="603504" y="1298448"/>
+            <a:ext cx="3913632" cy="274320"/>
+          </a:xfrm>
+          <a:prstGeom prst="rect">
+            <a:avLst/>
+          </a:prstGeom>
+          <a:noFill/>
+          <a:ln/>
+        </p:spPr>
+        <p:txBody>
+          <a:bodyPr wrap="square" lIns="0" tIns="0" rIns="0" bIns="0" rtlCol="0" anchor="ctr"/>
+          <a:lstStyle/>
+          <a:p>
+            <a:pPr indent="0" marL="0">
+              <a:buNone/>
+            </a:pPr>
+            <a:r>
+              <a:rPr lang="en-US" sz="1250" b="1" dirty="0">
+                <a:solidFill>
+                  <a:srgbClr val="1E2761"/>
+                </a:solidFill>
+                <a:latin typeface="Calibri" pitchFamily="34" charset="0"/>
+                <a:ea typeface="Calibri" pitchFamily="34" charset="-122"/>
+                <a:cs typeface="Calibri" pitchFamily="34" charset="-120"/>
+              </a:rPr>
+              <a:t>Le même outillage… sur de VRAIES données</a:t>
+            </a:r>
+            <a:endParaRPr lang="en-US" sz="1250" dirty="0"/>
+          </a:p>
+        </p:txBody>
       </p:sp>
       <p:sp>
         <p:nvSpPr>
@@ -40390,8 +41124,8 @@
         </p:nvSpPr>
         <p:spPr>
           <a:xfrm>
-            <a:off x="566928" y="1417320"/>
-            <a:ext cx="329184" cy="329184"/>
+            <a:off x="603504" y="1591056"/>
+            <a:ext cx="3913632" cy="905256"/>
           </a:xfrm>
           <a:prstGeom prst="rect">
             <a:avLst/>
@@ -40400,76 +41134,17 @@
           <a:ln/>
         </p:spPr>
         <p:txBody>
-          <a:bodyPr wrap="square" lIns="0" tIns="0" rIns="0" bIns="0" rtlCol="0" anchor="ctr"/>
-          <a:lstStyle/>
-          <a:p>
-            <a:pPr algn="ctr" indent="0" marL="0">
-              <a:buNone/>
-            </a:pPr>
-            <a:r>
-              <a:rPr lang="en-US" sz="1300" b="1" dirty="0">
-                <a:solidFill>
-                  <a:srgbClr val="FFFFFF"/>
-                </a:solidFill>
-                <a:latin typeface="Calibri" pitchFamily="34" charset="0"/>
-                <a:ea typeface="Calibri" pitchFamily="34" charset="-122"/>
-                <a:cs typeface="Calibri" pitchFamily="34" charset="-120"/>
-              </a:rPr>
-              <a:t>1</a:t>
-            </a:r>
-            <a:endParaRPr lang="en-US" sz="1300" dirty="0"/>
-          </a:p>
-        </p:txBody>
-      </p:sp>
-      <p:sp>
-        <p:nvSpPr>
-          <p:cNvPr id="7" name="Text 5"/>
-          <p:cNvSpPr/>
-          <p:nvPr/>
-        </p:nvSpPr>
-        <p:spPr>
-          <a:xfrm>
-            <a:off x="1005840" y="1261872"/>
-            <a:ext cx="3401568" cy="685800"/>
-          </a:xfrm>
-          <a:prstGeom prst="rect">
-            <a:avLst/>
-          </a:prstGeom>
-          <a:noFill/>
-          <a:ln/>
-        </p:spPr>
-        <p:txBody>
           <a:bodyPr wrap="square" lIns="0" tIns="0" rIns="0" bIns="0" rtlCol="0" anchor="t"/>
           <a:lstStyle/>
           <a:p>
             <a:pPr indent="0" marL="0">
               <a:lnSpc>
-                <a:spcPct val="105000"/>
-              </a:lnSpc>
-              <a:buNone/>
-            </a:pPr>
-            <a:r>
-              <a:rPr lang="en-US" sz="950" b="1" dirty="0">
-                <a:solidFill>
-                  <a:srgbClr val="1E2761"/>
-                </a:solidFill>
-                <a:latin typeface="Courier New" pitchFamily="34" charset="0"/>
-                <a:ea typeface="Courier New" pitchFamily="34" charset="-122"/>
-                <a:cs typeface="Courier New" pitchFamily="34" charset="-120"/>
-              </a:rPr>
-              <a:t>fit(X_test, y_test)</a:t>
-            </a:r>
-            <a:endParaRPr lang="en-US" sz="950" dirty="0"/>
-          </a:p>
-          <a:p>
-            <a:pPr indent="0" marL="0">
-              <a:lnSpc>
-                <a:spcPct val="105000"/>
-              </a:lnSpc>
-              <a:buNone/>
-            </a:pPr>
-            <a:r>
-              <a:rPr lang="en-US" sz="900" dirty="0">
+                <a:spcPct val="106000"/>
+              </a:lnSpc>
+              <a:buNone/>
+            </a:pPr>
+            <a:r>
+              <a:rPr lang="en-US" sz="1050" dirty="0">
                 <a:solidFill>
                   <a:srgbClr val="2A3550"/>
                 </a:solidFill>
@@ -40477,26 +41152,46 @@
                 <a:ea typeface="Calibri" pitchFamily="34" charset="-122"/>
                 <a:cs typeface="Calibri" pitchFamily="34" charset="-120"/>
               </a:rPr>
-              <a:t>entraîné sur le test = l'élève avec les corrigés (S2_P3)</a:t>
-            </a:r>
-            <a:endParaRPr lang="en-US" sz="950" dirty="0"/>
-          </a:p>
-        </p:txBody>
-      </p:sp>
-      <p:sp>
-        <p:nvSpPr>
-          <p:cNvPr id="8" name="Shape 6"/>
-          <p:cNvSpPr/>
-          <p:nvPr/>
-        </p:nvSpPr>
-        <p:spPr>
-          <a:xfrm>
-            <a:off x="4681728" y="1188720"/>
-            <a:ext cx="4041648" cy="804672"/>
+              <a:t>S8 : Iris et « moons », jolis et bien séparés. S9 : 28 638 demandes de crédit, 22 colonnes.</a:t>
+            </a:r>
+            <a:endParaRPr lang="en-US" sz="1050" dirty="0"/>
+          </a:p>
+          <a:p>
+            <a:pPr indent="0" marL="0">
+              <a:lnSpc>
+                <a:spcPct val="106000"/>
+              </a:lnSpc>
+              <a:buNone/>
+            </a:pPr>
+            <a:r>
+              <a:rPr lang="en-US" sz="1050" b="1" dirty="0">
+                <a:solidFill>
+                  <a:srgbClr val="2A3550"/>
+                </a:solidFill>
+                <a:latin typeface="Calibri" pitchFamily="34" charset="0"/>
+                <a:ea typeface="Calibri" pitchFamily="34" charset="-122"/>
+                <a:cs typeface="Calibri" pitchFamily="34" charset="-120"/>
+              </a:rPr>
+              <a:t>La question : sans jamais lui donner la réponse, l'algo retrouve-t-il les mauvais payeurs ?</a:t>
+            </a:r>
+            <a:endParaRPr lang="en-US" sz="1050" dirty="0"/>
+          </a:p>
+        </p:txBody>
+      </p:sp>
+      <p:sp>
+        <p:nvSpPr>
+          <p:cNvPr id="7" name="Shape 5"/>
+          <p:cNvSpPr/>
+          <p:nvPr/>
+        </p:nvSpPr>
+        <p:spPr>
+          <a:xfrm>
+            <a:off x="457200" y="2788920"/>
+            <a:ext cx="4206240" cy="960120"/>
           </a:xfrm>
           <a:prstGeom prst="roundRect">
             <a:avLst>
-              <a:gd name="adj" fmla="val 6818"/>
+              <a:gd name="adj" fmla="val 5714"/>
             </a:avLst>
           </a:prstGeom>
           <a:solidFill>
@@ -40514,34 +41209,14 @@
       </p:sp>
       <p:sp>
         <p:nvSpPr>
-          <p:cNvPr id="9" name="Shape 7"/>
-          <p:cNvSpPr/>
-          <p:nvPr/>
-        </p:nvSpPr>
-        <p:spPr>
-          <a:xfrm>
-            <a:off x="4791456" y="1426464"/>
-            <a:ext cx="329184" cy="329184"/>
-          </a:xfrm>
-          <a:prstGeom prst="ellipse">
-            <a:avLst/>
-          </a:prstGeom>
-          <a:solidFill>
-            <a:srgbClr val="D64550"/>
-          </a:solidFill>
-          <a:ln/>
-        </p:spPr>
-      </p:sp>
-      <p:sp>
-        <p:nvSpPr>
-          <p:cNvPr id="10" name="Text 8"/>
-          <p:cNvSpPr/>
-          <p:nvPr/>
-        </p:nvSpPr>
-        <p:spPr>
-          <a:xfrm>
-            <a:off x="4791456" y="1417320"/>
-            <a:ext cx="329184" cy="329184"/>
+          <p:cNvPr id="8" name="Text 6"/>
+          <p:cNvSpPr/>
+          <p:nvPr/>
+        </p:nvSpPr>
+        <p:spPr>
+          <a:xfrm>
+            <a:off x="603504" y="2898648"/>
+            <a:ext cx="3913632" cy="274320"/>
           </a:xfrm>
           <a:prstGeom prst="rect">
             <a:avLst/>
@@ -40553,34 +41228,34 @@
           <a:bodyPr wrap="square" lIns="0" tIns="0" rIns="0" bIns="0" rtlCol="0" anchor="ctr"/>
           <a:lstStyle/>
           <a:p>
-            <a:pPr algn="ctr" indent="0" marL="0">
-              <a:buNone/>
-            </a:pPr>
-            <a:r>
-              <a:rPr lang="en-US" sz="1300" b="1" dirty="0">
-                <a:solidFill>
-                  <a:srgbClr val="FFFFFF"/>
-                </a:solidFill>
-                <a:latin typeface="Calibri" pitchFamily="34" charset="0"/>
-                <a:ea typeface="Calibri" pitchFamily="34" charset="-122"/>
-                <a:cs typeface="Calibri" pitchFamily="34" charset="-120"/>
-              </a:rPr>
-              <a:t>2</a:t>
-            </a:r>
-            <a:endParaRPr lang="en-US" sz="1300" dirty="0"/>
-          </a:p>
-        </p:txBody>
-      </p:sp>
-      <p:sp>
-        <p:nvSpPr>
-          <p:cNvPr id="11" name="Text 9"/>
-          <p:cNvSpPr/>
-          <p:nvPr/>
-        </p:nvSpPr>
-        <p:spPr>
-          <a:xfrm>
-            <a:off x="5230368" y="1261872"/>
-            <a:ext cx="3401568" cy="685800"/>
+            <a:pPr indent="0" marL="0">
+              <a:buNone/>
+            </a:pPr>
+            <a:r>
+              <a:rPr lang="en-US" sz="1250" b="1" dirty="0">
+                <a:solidFill>
+                  <a:srgbClr val="1E2761"/>
+                </a:solidFill>
+                <a:latin typeface="Calibri" pitchFamily="34" charset="0"/>
+                <a:ea typeface="Calibri" pitchFamily="34" charset="-122"/>
+                <a:cs typeface="Calibri" pitchFamily="34" charset="-120"/>
+              </a:rPr>
+              <a:t>3 projections pour voir 22 dimensions</a:t>
+            </a:r>
+            <a:endParaRPr lang="en-US" sz="1250" dirty="0"/>
+          </a:p>
+        </p:txBody>
+      </p:sp>
+      <p:sp>
+        <p:nvSpPr>
+          <p:cNvPr id="9" name="Text 7"/>
+          <p:cNvSpPr/>
+          <p:nvPr/>
+        </p:nvSpPr>
+        <p:spPr>
+          <a:xfrm>
+            <a:off x="603504" y="3191256"/>
+            <a:ext cx="3913632" cy="448056"/>
           </a:xfrm>
           <a:prstGeom prst="rect">
             <a:avLst/>
@@ -40594,32 +41269,12 @@
           <a:p>
             <a:pPr indent="0" marL="0">
               <a:lnSpc>
-                <a:spcPct val="105000"/>
-              </a:lnSpc>
-              <a:buNone/>
-            </a:pPr>
-            <a:r>
-              <a:rPr lang="en-US" sz="950" b="1" dirty="0">
-                <a:solidFill>
-                  <a:srgbClr val="1E2761"/>
-                </a:solidFill>
-                <a:latin typeface="Courier New" pitchFamily="34" charset="0"/>
-                <a:ea typeface="Courier New" pitchFamily="34" charset="-122"/>
-                <a:cs typeface="Courier New" pitchFamily="34" charset="-120"/>
-              </a:rPr>
-              <a:t>classification_report(y_pred, y_test)</a:t>
-            </a:r>
-            <a:endParaRPr lang="en-US" sz="950" dirty="0"/>
-          </a:p>
-          <a:p>
-            <a:pPr indent="0" marL="0">
-              <a:lnSpc>
-                <a:spcPct val="105000"/>
-              </a:lnSpc>
-              <a:buNone/>
-            </a:pPr>
-            <a:r>
-              <a:rPr lang="en-US" sz="900" dirty="0">
+                <a:spcPct val="106000"/>
+              </a:lnSpc>
+              <a:buNone/>
+            </a:pPr>
+            <a:r>
+              <a:rPr lang="en-US" sz="1000" dirty="0">
                 <a:solidFill>
                   <a:srgbClr val="2A3550"/>
                 </a:solidFill>
@@ -40627,30 +41282,30 @@
                 <a:ea typeface="Calibri" pitchFamily="34" charset="-122"/>
                 <a:cs typeface="Calibri" pitchFamily="34" charset="-120"/>
               </a:rPr>
-              <a:t>ordre inversé → précision et rappel ÉCHANGÉS (S3)</a:t>
-            </a:r>
-            <a:endParaRPr lang="en-US" sz="950" dirty="0"/>
-          </a:p>
-        </p:txBody>
-      </p:sp>
-      <p:sp>
-        <p:nvSpPr>
-          <p:cNvPr id="12" name="Shape 10"/>
-          <p:cNvSpPr/>
-          <p:nvPr/>
-        </p:nvSpPr>
-        <p:spPr>
-          <a:xfrm>
-            <a:off x="457200" y="2103120"/>
-            <a:ext cx="4041648" cy="804672"/>
+              <a:t>PCA (linéaire) · ICA (indépendante) · t-SNE (voisinages) — et le clustering CHANGE selon la projection choisie !</a:t>
+            </a:r>
+            <a:endParaRPr lang="en-US" sz="1050" dirty="0"/>
+          </a:p>
+        </p:txBody>
+      </p:sp>
+      <p:sp>
+        <p:nvSpPr>
+          <p:cNvPr id="10" name="Shape 8"/>
+          <p:cNvSpPr/>
+          <p:nvPr/>
+        </p:nvSpPr>
+        <p:spPr>
+          <a:xfrm>
+            <a:off x="457200" y="3886200"/>
+            <a:ext cx="4206240" cy="914400"/>
           </a:xfrm>
           <a:prstGeom prst="roundRect">
             <a:avLst>
-              <a:gd name="adj" fmla="val 6818"/>
+              <a:gd name="adj" fmla="val 6000"/>
             </a:avLst>
           </a:prstGeom>
           <a:solidFill>
-            <a:srgbClr val="EEF4FE"/>
+            <a:srgbClr val="E9FAF5"/>
           </a:solidFill>
           <a:ln/>
           <a:effectLst>
@@ -40664,143 +41319,103 @@
       </p:sp>
       <p:sp>
         <p:nvSpPr>
+          <p:cNvPr id="11" name="Text 9"/>
+          <p:cNvSpPr/>
+          <p:nvPr/>
+        </p:nvSpPr>
+        <p:spPr>
+          <a:xfrm>
+            <a:off x="603504" y="3995928"/>
+            <a:ext cx="3913632" cy="274320"/>
+          </a:xfrm>
+          <a:prstGeom prst="rect">
+            <a:avLst/>
+          </a:prstGeom>
+          <a:noFill/>
+          <a:ln/>
+        </p:spPr>
+        <p:txBody>
+          <a:bodyPr wrap="square" lIns="0" tIns="0" rIns="0" bIns="0" rtlCol="0" anchor="ctr"/>
+          <a:lstStyle/>
+          <a:p>
+            <a:pPr indent="0" marL="0">
+              <a:buNone/>
+            </a:pPr>
+            <a:r>
+              <a:rPr lang="en-US" sz="1250" b="1" dirty="0">
+                <a:solidFill>
+                  <a:srgbClr val="1E2761"/>
+                </a:solidFill>
+                <a:latin typeface="Calibri" pitchFamily="34" charset="0"/>
+                <a:ea typeface="Calibri" pitchFamily="34" charset="-122"/>
+                <a:cs typeface="Calibri" pitchFamily="34" charset="-120"/>
+              </a:rPr>
+              <a:t>⚡ silhouette_score(..., sample_size=2000)</a:t>
+            </a:r>
+            <a:endParaRPr lang="en-US" sz="1250" dirty="0"/>
+          </a:p>
+        </p:txBody>
+      </p:sp>
+      <p:sp>
+        <p:nvSpPr>
+          <p:cNvPr id="12" name="Text 10"/>
+          <p:cNvSpPr/>
+          <p:nvPr/>
+        </p:nvSpPr>
+        <p:spPr>
+          <a:xfrm>
+            <a:off x="603504" y="4288536"/>
+            <a:ext cx="3913632" cy="402336"/>
+          </a:xfrm>
+          <a:prstGeom prst="rect">
+            <a:avLst/>
+          </a:prstGeom>
+          <a:noFill/>
+          <a:ln/>
+        </p:spPr>
+        <p:txBody>
+          <a:bodyPr wrap="square" lIns="0" tIns="0" rIns="0" bIns="0" rtlCol="0" anchor="t"/>
+          <a:lstStyle/>
+          <a:p>
+            <a:pPr indent="0" marL="0">
+              <a:lnSpc>
+                <a:spcPct val="106000"/>
+              </a:lnSpc>
+              <a:buNone/>
+            </a:pPr>
+            <a:r>
+              <a:rPr lang="en-US" sz="950" dirty="0">
+                <a:solidFill>
+                  <a:srgbClr val="2A3550"/>
+                </a:solidFill>
+                <a:latin typeface="Calibri" pitchFamily="34" charset="0"/>
+                <a:ea typeface="Calibri" pitchFamily="34" charset="-122"/>
+                <a:cs typeface="Calibri" pitchFamily="34" charset="-120"/>
+              </a:rPr>
+              <a:t>En O(n²) : 11 s PAR k sur 28 638 lignes (≈3,5 min la boucle) → 4 s au total. Cherche l'option d'échantillonnage avant d'abandonner !</a:t>
+            </a:r>
+            <a:endParaRPr lang="en-US" sz="1050" dirty="0"/>
+          </a:p>
+        </p:txBody>
+      </p:sp>
+      <p:sp>
+        <p:nvSpPr>
           <p:cNvPr id="13" name="Shape 11"/>
           <p:cNvSpPr/>
           <p:nvPr/>
         </p:nvSpPr>
         <p:spPr>
           <a:xfrm>
-            <a:off x="566928" y="2340864"/>
-            <a:ext cx="329184" cy="329184"/>
-          </a:xfrm>
-          <a:prstGeom prst="ellipse">
-            <a:avLst/>
-          </a:prstGeom>
-          <a:solidFill>
-            <a:srgbClr val="D64550"/>
-          </a:solidFill>
-          <a:ln/>
-        </p:spPr>
-      </p:sp>
-      <p:sp>
-        <p:nvSpPr>
-          <p:cNvPr id="14" name="Text 12"/>
-          <p:cNvSpPr/>
-          <p:nvPr/>
-        </p:nvSpPr>
-        <p:spPr>
-          <a:xfrm>
-            <a:off x="566928" y="2331720"/>
-            <a:ext cx="329184" cy="329184"/>
-          </a:xfrm>
-          <a:prstGeom prst="rect">
-            <a:avLst/>
-          </a:prstGeom>
-          <a:noFill/>
-          <a:ln/>
-        </p:spPr>
-        <p:txBody>
-          <a:bodyPr wrap="square" lIns="0" tIns="0" rIns="0" bIns="0" rtlCol="0" anchor="ctr"/>
-          <a:lstStyle/>
-          <a:p>
-            <a:pPr algn="ctr" indent="0" marL="0">
-              <a:buNone/>
-            </a:pPr>
-            <a:r>
-              <a:rPr lang="en-US" sz="1300" b="1" dirty="0">
-                <a:solidFill>
-                  <a:srgbClr val="FFFFFF"/>
-                </a:solidFill>
-                <a:latin typeface="Calibri" pitchFamily="34" charset="0"/>
-                <a:ea typeface="Calibri" pitchFamily="34" charset="-122"/>
-                <a:cs typeface="Calibri" pitchFamily="34" charset="-120"/>
-              </a:rPr>
-              <a:t>3</a:t>
-            </a:r>
-            <a:endParaRPr lang="en-US" sz="1300" dirty="0"/>
-          </a:p>
-        </p:txBody>
-      </p:sp>
-      <p:sp>
-        <p:nvSpPr>
-          <p:cNvPr id="15" name="Text 13"/>
-          <p:cNvSpPr/>
-          <p:nvPr/>
-        </p:nvSpPr>
-        <p:spPr>
-          <a:xfrm>
-            <a:off x="1005840" y="2176272"/>
-            <a:ext cx="3401568" cy="685800"/>
-          </a:xfrm>
-          <a:prstGeom prst="rect">
-            <a:avLst/>
-          </a:prstGeom>
-          <a:noFill/>
-          <a:ln/>
-        </p:spPr>
-        <p:txBody>
-          <a:bodyPr wrap="square" lIns="0" tIns="0" rIns="0" bIns="0" rtlCol="0" anchor="t"/>
-          <a:lstStyle/>
-          <a:p>
-            <a:pPr indent="0" marL="0">
-              <a:lnSpc>
-                <a:spcPct val="105000"/>
-              </a:lnSpc>
-              <a:buNone/>
-            </a:pPr>
-            <a:r>
-              <a:rPr lang="en-US" sz="950" b="1" dirty="0">
-                <a:solidFill>
-                  <a:srgbClr val="1E2761"/>
-                </a:solidFill>
-                <a:latin typeface="Courier New" pitchFamily="34" charset="0"/>
-                <a:ea typeface="Courier New" pitchFamily="34" charset="-122"/>
-                <a:cs typeface="Courier New" pitchFamily="34" charset="-120"/>
-              </a:rPr>
-              <a:t>Le kernel qui « sauve »</a:t>
-            </a:r>
-            <a:endParaRPr lang="en-US" sz="950" dirty="0"/>
-          </a:p>
-          <a:p>
-            <a:pPr indent="0" marL="0">
-              <a:lnSpc>
-                <a:spcPct val="105000"/>
-              </a:lnSpc>
-              <a:buNone/>
-            </a:pPr>
-            <a:r>
-              <a:rPr lang="en-US" sz="900" dirty="0">
-                <a:solidFill>
-                  <a:srgbClr val="2A3550"/>
-                </a:solidFill>
-                <a:latin typeface="Calibri" pitchFamily="34" charset="0"/>
-                <a:ea typeface="Calibri" pitchFamily="34" charset="-122"/>
-                <a:cs typeface="Calibri" pitchFamily="34" charset="-120"/>
-              </a:rPr>
-              <a:t>imports supprimés mais encore en mémoire → Restart &amp; Run All ! (S3_P4)</a:t>
-            </a:r>
-            <a:endParaRPr lang="en-US" sz="950" dirty="0"/>
-          </a:p>
-        </p:txBody>
-      </p:sp>
-      <p:sp>
-        <p:nvSpPr>
-          <p:cNvPr id="16" name="Shape 14"/>
-          <p:cNvSpPr/>
-          <p:nvPr/>
-        </p:nvSpPr>
-        <p:spPr>
-          <a:xfrm>
-            <a:off x="4681728" y="2103120"/>
-            <a:ext cx="4041648" cy="804672"/>
+            <a:off x="4846320" y="1188720"/>
+            <a:ext cx="3840480" cy="1920240"/>
           </a:xfrm>
           <a:prstGeom prst="roundRect">
             <a:avLst>
-              <a:gd name="adj" fmla="val 6818"/>
+              <a:gd name="adj" fmla="val 2857"/>
             </a:avLst>
           </a:prstGeom>
           <a:solidFill>
-            <a:srgbClr val="EEF4FE"/>
+            <a:srgbClr val="FFF6DD"/>
           </a:solidFill>
           <a:ln/>
           <a:effectLst>
@@ -40814,34 +41429,14 @@
       </p:sp>
       <p:sp>
         <p:nvSpPr>
-          <p:cNvPr id="17" name="Shape 15"/>
-          <p:cNvSpPr/>
-          <p:nvPr/>
-        </p:nvSpPr>
-        <p:spPr>
-          <a:xfrm>
-            <a:off x="4791456" y="2340864"/>
-            <a:ext cx="329184" cy="329184"/>
-          </a:xfrm>
-          <a:prstGeom prst="ellipse">
-            <a:avLst/>
-          </a:prstGeom>
-          <a:solidFill>
-            <a:srgbClr val="D64550"/>
-          </a:solidFill>
-          <a:ln/>
-        </p:spPr>
-      </p:sp>
-      <p:sp>
-        <p:nvSpPr>
-          <p:cNvPr id="18" name="Text 16"/>
-          <p:cNvSpPr/>
-          <p:nvPr/>
-        </p:nvSpPr>
-        <p:spPr>
-          <a:xfrm>
-            <a:off x="4791456" y="2331720"/>
-            <a:ext cx="329184" cy="329184"/>
+          <p:cNvPr id="14" name="Text 12"/>
+          <p:cNvSpPr/>
+          <p:nvPr/>
+        </p:nvSpPr>
+        <p:spPr>
+          <a:xfrm>
+            <a:off x="4992624" y="1298448"/>
+            <a:ext cx="3547872" cy="274320"/>
           </a:xfrm>
           <a:prstGeom prst="rect">
             <a:avLst/>
@@ -40853,34 +41448,34 @@
           <a:bodyPr wrap="square" lIns="0" tIns="0" rIns="0" bIns="0" rtlCol="0" anchor="ctr"/>
           <a:lstStyle/>
           <a:p>
-            <a:pPr algn="ctr" indent="0" marL="0">
-              <a:buNone/>
-            </a:pPr>
-            <a:r>
-              <a:rPr lang="en-US" sz="1300" b="1" dirty="0">
-                <a:solidFill>
-                  <a:srgbClr val="FFFFFF"/>
-                </a:solidFill>
-                <a:latin typeface="Calibri" pitchFamily="34" charset="0"/>
-                <a:ea typeface="Calibri" pitchFamily="34" charset="-122"/>
-                <a:cs typeface="Calibri" pitchFamily="34" charset="-120"/>
-              </a:rPr>
-              <a:t>4</a:t>
-            </a:r>
-            <a:endParaRPr lang="en-US" sz="1300" dirty="0"/>
-          </a:p>
-        </p:txBody>
-      </p:sp>
-      <p:sp>
-        <p:nvSpPr>
-          <p:cNvPr id="19" name="Text 17"/>
-          <p:cNvSpPr/>
-          <p:nvPr/>
-        </p:nvSpPr>
-        <p:spPr>
-          <a:xfrm>
-            <a:off x="5230368" y="2176272"/>
-            <a:ext cx="3401568" cy="685800"/>
+            <a:pPr indent="0" marL="0">
+              <a:buNone/>
+            </a:pPr>
+            <a:r>
+              <a:rPr lang="en-US" sz="1250" b="1" dirty="0">
+                <a:solidFill>
+                  <a:srgbClr val="1E2761"/>
+                </a:solidFill>
+                <a:latin typeface="Calibri" pitchFamily="34" charset="0"/>
+                <a:ea typeface="Calibri" pitchFamily="34" charset="-122"/>
+                <a:cs typeface="Calibri" pitchFamily="34" charset="-120"/>
+              </a:rPr>
+              <a:t>🎯 LA leçon : DBSCAN renvoie [-1, 0]</a:t>
+            </a:r>
+            <a:endParaRPr lang="en-US" sz="1250" dirty="0"/>
+          </a:p>
+        </p:txBody>
+      </p:sp>
+      <p:sp>
+        <p:nvSpPr>
+          <p:cNvPr id="15" name="Text 13"/>
+          <p:cNvSpPr/>
+          <p:nvPr/>
+        </p:nvSpPr>
+        <p:spPr>
+          <a:xfrm>
+            <a:off x="4992624" y="1591056"/>
+            <a:ext cx="3547872" cy="1408176"/>
           </a:xfrm>
           <a:prstGeom prst="rect">
             <a:avLst/>
@@ -40894,32 +41489,12 @@
           <a:p>
             <a:pPr indent="0" marL="0">
               <a:lnSpc>
-                <a:spcPct val="105000"/>
-              </a:lnSpc>
-              <a:buNone/>
-            </a:pPr>
-            <a:r>
-              <a:rPr lang="en-US" sz="950" b="1" dirty="0">
-                <a:solidFill>
-                  <a:srgbClr val="1E2761"/>
-                </a:solidFill>
-                <a:latin typeface="Courier New" pitchFamily="34" charset="0"/>
-                <a:ea typeface="Courier New" pitchFamily="34" charset="-122"/>
-                <a:cs typeface="Courier New" pitchFamily="34" charset="-120"/>
-              </a:rPr>
-              <a:t>price / 1e6 exécuté 2 fois</a:t>
-            </a:r>
-            <a:endParaRPr lang="en-US" sz="950" dirty="0"/>
-          </a:p>
-          <a:p>
-            <a:pPr indent="0" marL="0">
-              <a:lnSpc>
-                <a:spcPct val="105000"/>
-              </a:lnSpc>
-              <a:buNone/>
-            </a:pPr>
-            <a:r>
-              <a:rPr lang="en-US" sz="900" dirty="0">
+                <a:spcPct val="106000"/>
+              </a:lnSpc>
+              <a:buNone/>
+            </a:pPr>
+            <a:r>
+              <a:rPr lang="en-US" sz="1050" dirty="0">
                 <a:solidFill>
                   <a:srgbClr val="2A3550"/>
                 </a:solidFill>
@@ -40927,26 +41502,66 @@
                 <a:ea typeface="Calibri" pitchFamily="34" charset="-122"/>
                 <a:cs typeface="Calibri" pitchFamily="34" charset="-120"/>
               </a:rPr>
-              <a:t>cellule non-idempotente → tous les résultats faussés (S1_P2)</a:t>
-            </a:r>
-            <a:endParaRPr lang="en-US" sz="950" dirty="0"/>
-          </a:p>
-        </p:txBody>
-      </p:sp>
-      <p:sp>
-        <p:nvSpPr>
-          <p:cNvPr id="20" name="Shape 18"/>
-          <p:cNvSpPr/>
-          <p:nvPr/>
-        </p:nvSpPr>
-        <p:spPr>
-          <a:xfrm>
-            <a:off x="457200" y="3017520"/>
-            <a:ext cx="4041648" cy="804672"/>
+              <a:t>Un SEUL cluster + du bruit. En 22 dimensions, les vraies données forment une masse continue — pas de « vallée » de densité à couper.</a:t>
+            </a:r>
+            <a:endParaRPr lang="en-US" sz="1050" dirty="0"/>
+          </a:p>
+          <a:p>
+            <a:pPr indent="0" marL="0">
+              <a:lnSpc>
+                <a:spcPct val="106000"/>
+              </a:lnSpc>
+              <a:buNone/>
+            </a:pPr>
+            <a:r>
+              <a:rPr lang="en-US" sz="1050" b="1" dirty="0">
+                <a:solidFill>
+                  <a:srgbClr val="2A3550"/>
+                </a:solidFill>
+                <a:latin typeface="Calibri" pitchFamily="34" charset="0"/>
+                <a:ea typeface="Calibri" pitchFamily="34" charset="-122"/>
+                <a:cs typeface="Calibri" pitchFamily="34" charset="-120"/>
+              </a:rPr>
+              <a:t>Et les clusters KMeans ne correspondent PAS aux défauts.</a:t>
+            </a:r>
+            <a:endParaRPr lang="en-US" sz="1050" dirty="0"/>
+          </a:p>
+          <a:p>
+            <a:pPr indent="0" marL="0">
+              <a:lnSpc>
+                <a:spcPct val="106000"/>
+              </a:lnSpc>
+              <a:buNone/>
+            </a:pPr>
+            <a:r>
+              <a:rPr lang="en-US" sz="1000" i="1" dirty="0">
+                <a:solidFill>
+                  <a:srgbClr val="2A3550"/>
+                </a:solidFill>
+                <a:latin typeface="Calibri" pitchFamily="34" charset="0"/>
+                <a:ea typeface="Calibri" pitchFamily="34" charset="-122"/>
+                <a:cs typeface="Calibri" pitchFamily="34" charset="-120"/>
+              </a:rPr>
+              <a:t>Ce n'est pas un échec : le non supervisé trouve des structures GÉOMÉTRIQUES, pas la réponse qui t'intéresse.</a:t>
+            </a:r>
+            <a:endParaRPr lang="en-US" sz="1050" dirty="0"/>
+          </a:p>
+        </p:txBody>
+      </p:sp>
+      <p:sp>
+        <p:nvSpPr>
+          <p:cNvPr id="16" name="Shape 14"/>
+          <p:cNvSpPr/>
+          <p:nvPr/>
+        </p:nvSpPr>
+        <p:spPr>
+          <a:xfrm>
+            <a:off x="4846320" y="3291840"/>
+            <a:ext cx="3840480" cy="1508760"/>
           </a:xfrm>
           <a:prstGeom prst="roundRect">
             <a:avLst>
-              <a:gd name="adj" fmla="val 6818"/>
+              <a:gd name="adj" fmla="val 3636"/>
             </a:avLst>
           </a:prstGeom>
           <a:solidFill>
@@ -40964,34 +41579,14 @@
       </p:sp>
       <p:sp>
         <p:nvSpPr>
-          <p:cNvPr id="21" name="Shape 19"/>
-          <p:cNvSpPr/>
-          <p:nvPr/>
-        </p:nvSpPr>
-        <p:spPr>
-          <a:xfrm>
-            <a:off x="566928" y="3255264"/>
-            <a:ext cx="329184" cy="329184"/>
-          </a:xfrm>
-          <a:prstGeom prst="ellipse">
-            <a:avLst/>
-          </a:prstGeom>
-          <a:solidFill>
-            <a:srgbClr val="D64550"/>
-          </a:solidFill>
-          <a:ln/>
-        </p:spPr>
-      </p:sp>
-      <p:sp>
-        <p:nvSpPr>
-          <p:cNvPr id="22" name="Text 20"/>
-          <p:cNvSpPr/>
-          <p:nvPr/>
-        </p:nvSpPr>
-        <p:spPr>
-          <a:xfrm>
-            <a:off x="566928" y="3246120"/>
-            <a:ext cx="329184" cy="329184"/>
+          <p:cNvPr id="17" name="Text 15"/>
+          <p:cNvSpPr/>
+          <p:nvPr/>
+        </p:nvSpPr>
+        <p:spPr>
+          <a:xfrm>
+            <a:off x="4992624" y="3401568"/>
+            <a:ext cx="3547872" cy="274320"/>
           </a:xfrm>
           <a:prstGeom prst="rect">
             <a:avLst/>
@@ -41003,34 +41598,34 @@
           <a:bodyPr wrap="square" lIns="0" tIns="0" rIns="0" bIns="0" rtlCol="0" anchor="ctr"/>
           <a:lstStyle/>
           <a:p>
-            <a:pPr algn="ctr" indent="0" marL="0">
-              <a:buNone/>
-            </a:pPr>
-            <a:r>
-              <a:rPr lang="en-US" sz="1300" b="1" dirty="0">
-                <a:solidFill>
-                  <a:srgbClr val="FFFFFF"/>
-                </a:solidFill>
-                <a:latin typeface="Calibri" pitchFamily="34" charset="0"/>
-                <a:ea typeface="Calibri" pitchFamily="34" charset="-122"/>
-                <a:cs typeface="Calibri" pitchFamily="34" charset="-120"/>
-              </a:rPr>
-              <a:t>5</a:t>
-            </a:r>
-            <a:endParaRPr lang="en-US" sz="1300" dirty="0"/>
-          </a:p>
-        </p:txBody>
-      </p:sp>
-      <p:sp>
-        <p:nvSpPr>
-          <p:cNvPr id="23" name="Text 21"/>
-          <p:cNvSpPr/>
-          <p:nvPr/>
-        </p:nvSpPr>
-        <p:spPr>
-          <a:xfrm>
-            <a:off x="1005840" y="3090672"/>
-            <a:ext cx="3401568" cy="685800"/>
+            <a:pPr indent="0" marL="0">
+              <a:buNone/>
+            </a:pPr>
+            <a:r>
+              <a:rPr lang="en-US" sz="1250" b="1" dirty="0">
+                <a:solidFill>
+                  <a:srgbClr val="1E2761"/>
+                </a:solidFill>
+                <a:latin typeface="Calibri" pitchFamily="34" charset="0"/>
+                <a:ea typeface="Calibri" pitchFamily="34" charset="-122"/>
+                <a:cs typeface="Calibri" pitchFamily="34" charset="-120"/>
+              </a:rPr>
+              <a:t>Supervisé vs non supervisé : quand ?</a:t>
+            </a:r>
+            <a:endParaRPr lang="en-US" sz="1250" dirty="0"/>
+          </a:p>
+        </p:txBody>
+      </p:sp>
+      <p:sp>
+        <p:nvSpPr>
+          <p:cNvPr id="18" name="Text 16"/>
+          <p:cNvSpPr/>
+          <p:nvPr/>
+        </p:nvSpPr>
+        <p:spPr>
+          <a:xfrm>
+            <a:off x="4992624" y="3694176"/>
+            <a:ext cx="3547872" cy="996696"/>
           </a:xfrm>
           <a:prstGeom prst="rect">
             <a:avLst/>
@@ -41044,32 +41639,12 @@
           <a:p>
             <a:pPr indent="0" marL="0">
               <a:lnSpc>
-                <a:spcPct val="105000"/>
-              </a:lnSpc>
-              <a:buNone/>
-            </a:pPr>
-            <a:r>
-              <a:rPr lang="en-US" sz="950" b="1" dirty="0">
-                <a:solidFill>
-                  <a:srgbClr val="1E2761"/>
-                </a:solidFill>
-                <a:latin typeface="Courier New" pitchFamily="34" charset="0"/>
-                <a:ea typeface="Courier New" pitchFamily="34" charset="-122"/>
-                <a:cs typeface="Courier New" pitchFamily="34" charset="-120"/>
-              </a:rPr>
-              <a:t>b = a  sur une liste</a:t>
-            </a:r>
-            <a:endParaRPr lang="en-US" sz="950" dirty="0"/>
-          </a:p>
-          <a:p>
-            <a:pPr indent="0" marL="0">
-              <a:lnSpc>
-                <a:spcPct val="105000"/>
-              </a:lnSpc>
-              <a:buNone/>
-            </a:pPr>
-            <a:r>
-              <a:rPr lang="en-US" sz="900" dirty="0">
+                <a:spcPct val="106000"/>
+              </a:lnSpc>
+              <a:buNone/>
+            </a:pPr>
+            <a:r>
+              <a:rPr lang="en-US" sz="1050" dirty="0">
                 <a:solidFill>
                   <a:srgbClr val="2A3550"/>
                 </a:solidFill>
@@ -41077,149 +41652,19 @@
                 <a:ea typeface="Calibri" pitchFamily="34" charset="-122"/>
                 <a:cs typeface="Calibri" pitchFamily="34" charset="-120"/>
               </a:rPr>
-              <a:t>pas une copie ! .copy() sinon modifications partagées (day2)</a:t>
-            </a:r>
-            <a:endParaRPr lang="en-US" sz="950" dirty="0"/>
-          </a:p>
-        </p:txBody>
-      </p:sp>
-      <p:sp>
-        <p:nvSpPr>
-          <p:cNvPr id="24" name="Shape 22"/>
-          <p:cNvSpPr/>
-          <p:nvPr/>
-        </p:nvSpPr>
-        <p:spPr>
-          <a:xfrm>
-            <a:off x="4681728" y="3017520"/>
-            <a:ext cx="4041648" cy="804672"/>
-          </a:xfrm>
-          <a:prstGeom prst="roundRect">
-            <a:avLst>
-              <a:gd name="adj" fmla="val 6818"/>
-            </a:avLst>
-          </a:prstGeom>
-          <a:solidFill>
-            <a:srgbClr val="EEF4FE"/>
-          </a:solidFill>
-          <a:ln/>
-          <a:effectLst>
-            <a:outerShdw sx="100000" sy="100000" kx="0" ky="0" algn="bl" rotWithShape="0" blurRad="88900" dist="25400" dir="2700000">
-              <a:srgbClr val="000000">
-                <a:alpha val="14000"/>
-              </a:srgbClr>
-            </a:outerShdw>
-          </a:effectLst>
-        </p:spPr>
-      </p:sp>
-      <p:sp>
-        <p:nvSpPr>
-          <p:cNvPr id="25" name="Shape 23"/>
-          <p:cNvSpPr/>
-          <p:nvPr/>
-        </p:nvSpPr>
-        <p:spPr>
-          <a:xfrm>
-            <a:off x="4791456" y="3255264"/>
-            <a:ext cx="329184" cy="329184"/>
-          </a:xfrm>
-          <a:prstGeom prst="ellipse">
-            <a:avLst/>
-          </a:prstGeom>
-          <a:solidFill>
-            <a:srgbClr val="D64550"/>
-          </a:solidFill>
-          <a:ln/>
-        </p:spPr>
-      </p:sp>
-      <p:sp>
-        <p:nvSpPr>
-          <p:cNvPr id="26" name="Text 24"/>
-          <p:cNvSpPr/>
-          <p:nvPr/>
-        </p:nvSpPr>
-        <p:spPr>
-          <a:xfrm>
-            <a:off x="4791456" y="3246120"/>
-            <a:ext cx="329184" cy="329184"/>
-          </a:xfrm>
-          <a:prstGeom prst="rect">
-            <a:avLst/>
-          </a:prstGeom>
-          <a:noFill/>
-          <a:ln/>
-        </p:spPr>
-        <p:txBody>
-          <a:bodyPr wrap="square" lIns="0" tIns="0" rIns="0" bIns="0" rtlCol="0" anchor="ctr"/>
-          <a:lstStyle/>
-          <a:p>
-            <a:pPr algn="ctr" indent="0" marL="0">
-              <a:buNone/>
-            </a:pPr>
-            <a:r>
-              <a:rPr lang="en-US" sz="1300" b="1" dirty="0">
-                <a:solidFill>
-                  <a:srgbClr val="FFFFFF"/>
-                </a:solidFill>
-                <a:latin typeface="Calibri" pitchFamily="34" charset="0"/>
-                <a:ea typeface="Calibri" pitchFamily="34" charset="-122"/>
-                <a:cs typeface="Calibri" pitchFamily="34" charset="-120"/>
-              </a:rPr>
-              <a:t>6</a:t>
-            </a:r>
-            <a:endParaRPr lang="en-US" sz="1300" dirty="0"/>
-          </a:p>
-        </p:txBody>
-      </p:sp>
-      <p:sp>
-        <p:nvSpPr>
-          <p:cNvPr id="27" name="Text 25"/>
-          <p:cNvSpPr/>
-          <p:nvPr/>
-        </p:nvSpPr>
-        <p:spPr>
-          <a:xfrm>
-            <a:off x="5230368" y="3090672"/>
-            <a:ext cx="3401568" cy="685800"/>
-          </a:xfrm>
-          <a:prstGeom prst="rect">
-            <a:avLst/>
-          </a:prstGeom>
-          <a:noFill/>
-          <a:ln/>
-        </p:spPr>
-        <p:txBody>
-          <a:bodyPr wrap="square" lIns="0" tIns="0" rIns="0" bIns="0" rtlCol="0" anchor="t"/>
-          <a:lstStyle/>
-          <a:p>
-            <a:pPr indent="0" marL="0">
-              <a:lnSpc>
-                <a:spcPct val="105000"/>
-              </a:lnSpc>
-              <a:buNone/>
-            </a:pPr>
-            <a:r>
-              <a:rPr lang="en-US" sz="950" b="1" dirty="0">
-                <a:solidFill>
-                  <a:srgbClr val="1E2761"/>
-                </a:solidFill>
-                <a:latin typeface="Courier New" pitchFamily="34" charset="0"/>
-                <a:ea typeface="Courier New" pitchFamily="34" charset="-122"/>
-                <a:cs typeface="Courier New" pitchFamily="34" charset="-120"/>
-              </a:rPr>
-              <a:t>hypot(a**2 + b**2)</a:t>
-            </a:r>
-            <a:endParaRPr lang="en-US" sz="950" dirty="0"/>
-          </a:p>
-          <a:p>
-            <a:pPr indent="0" marL="0">
-              <a:lnSpc>
-                <a:spcPct val="105000"/>
-              </a:lnSpc>
-              <a:buNone/>
-            </a:pPr>
-            <a:r>
-              <a:rPr lang="en-US" sz="900" dirty="0">
+              <a:t>Tu connais la cible (défaut) → SUPERVISÉ (S7 : AUC 0.94 ✅)</a:t>
+            </a:r>
+            <a:endParaRPr lang="en-US" sz="1050" dirty="0"/>
+          </a:p>
+          <a:p>
+            <a:pPr indent="0" marL="0">
+              <a:lnSpc>
+                <a:spcPct val="106000"/>
+              </a:lnSpc>
+              <a:buNone/>
+            </a:pPr>
+            <a:r>
+              <a:rPr lang="en-US" sz="1050" dirty="0">
                 <a:solidFill>
                   <a:srgbClr val="2A3550"/>
                 </a:solidFill>
@@ -41227,149 +41672,19 @@
                 <a:ea typeface="Calibri" pitchFamily="34" charset="-122"/>
                 <a:cs typeface="Calibri" pitchFamily="34" charset="-120"/>
               </a:rPr>
-              <a:t>hypoténuse de 767 km — vérifier la SIGNATURE (fonction?) (day1)</a:t>
-            </a:r>
-            <a:endParaRPr lang="en-US" sz="950" dirty="0"/>
-          </a:p>
-        </p:txBody>
-      </p:sp>
-      <p:sp>
-        <p:nvSpPr>
-          <p:cNvPr id="28" name="Shape 26"/>
-          <p:cNvSpPr/>
-          <p:nvPr/>
-        </p:nvSpPr>
-        <p:spPr>
-          <a:xfrm>
-            <a:off x="457200" y="3931920"/>
-            <a:ext cx="4041648" cy="804672"/>
-          </a:xfrm>
-          <a:prstGeom prst="roundRect">
-            <a:avLst>
-              <a:gd name="adj" fmla="val 6818"/>
-            </a:avLst>
-          </a:prstGeom>
-          <a:solidFill>
-            <a:srgbClr val="EEF4FE"/>
-          </a:solidFill>
-          <a:ln/>
-          <a:effectLst>
-            <a:outerShdw sx="100000" sy="100000" kx="0" ky="0" algn="bl" rotWithShape="0" blurRad="88900" dist="25400" dir="2700000">
-              <a:srgbClr val="000000">
-                <a:alpha val="14000"/>
-              </a:srgbClr>
-            </a:outerShdw>
-          </a:effectLst>
-        </p:spPr>
-      </p:sp>
-      <p:sp>
-        <p:nvSpPr>
-          <p:cNvPr id="29" name="Shape 27"/>
-          <p:cNvSpPr/>
-          <p:nvPr/>
-        </p:nvSpPr>
-        <p:spPr>
-          <a:xfrm>
-            <a:off x="566928" y="4169664"/>
-            <a:ext cx="329184" cy="329184"/>
-          </a:xfrm>
-          <a:prstGeom prst="ellipse">
-            <a:avLst/>
-          </a:prstGeom>
-          <a:solidFill>
-            <a:srgbClr val="D64550"/>
-          </a:solidFill>
-          <a:ln/>
-        </p:spPr>
-      </p:sp>
-      <p:sp>
-        <p:nvSpPr>
-          <p:cNvPr id="30" name="Text 28"/>
-          <p:cNvSpPr/>
-          <p:nvPr/>
-        </p:nvSpPr>
-        <p:spPr>
-          <a:xfrm>
-            <a:off x="566928" y="4160520"/>
-            <a:ext cx="329184" cy="329184"/>
-          </a:xfrm>
-          <a:prstGeom prst="rect">
-            <a:avLst/>
-          </a:prstGeom>
-          <a:noFill/>
-          <a:ln/>
-        </p:spPr>
-        <p:txBody>
-          <a:bodyPr wrap="square" lIns="0" tIns="0" rIns="0" bIns="0" rtlCol="0" anchor="ctr"/>
-          <a:lstStyle/>
-          <a:p>
-            <a:pPr algn="ctr" indent="0" marL="0">
-              <a:buNone/>
-            </a:pPr>
-            <a:r>
-              <a:rPr lang="en-US" sz="1300" b="1" dirty="0">
-                <a:solidFill>
-                  <a:srgbClr val="FFFFFF"/>
-                </a:solidFill>
-                <a:latin typeface="Calibri" pitchFamily="34" charset="0"/>
-                <a:ea typeface="Calibri" pitchFamily="34" charset="-122"/>
-                <a:cs typeface="Calibri" pitchFamily="34" charset="-120"/>
-              </a:rPr>
-              <a:t>7</a:t>
-            </a:r>
-            <a:endParaRPr lang="en-US" sz="1300" dirty="0"/>
-          </a:p>
-        </p:txBody>
-      </p:sp>
-      <p:sp>
-        <p:nvSpPr>
-          <p:cNvPr id="31" name="Text 29"/>
-          <p:cNvSpPr/>
-          <p:nvPr/>
-        </p:nvSpPr>
-        <p:spPr>
-          <a:xfrm>
-            <a:off x="1005840" y="4005072"/>
-            <a:ext cx="3401568" cy="685800"/>
-          </a:xfrm>
-          <a:prstGeom prst="rect">
-            <a:avLst/>
-          </a:prstGeom>
-          <a:noFill/>
-          <a:ln/>
-        </p:spPr>
-        <p:txBody>
-          <a:bodyPr wrap="square" lIns="0" tIns="0" rIns="0" bIns="0" rtlCol="0" anchor="t"/>
-          <a:lstStyle/>
-          <a:p>
-            <a:pPr indent="0" marL="0">
-              <a:lnSpc>
-                <a:spcPct val="105000"/>
-              </a:lnSpc>
-              <a:buNone/>
-            </a:pPr>
-            <a:r>
-              <a:rPr lang="en-US" sz="950" b="1" dirty="0">
-                <a:solidFill>
-                  <a:srgbClr val="1E2761"/>
-                </a:solidFill>
-                <a:latin typeface="Courier New" pitchFamily="34" charset="0"/>
-                <a:ea typeface="Courier New" pitchFamily="34" charset="-122"/>
-                <a:cs typeface="Courier New" pitchFamily="34" charset="-120"/>
-              </a:rPr>
-              <a:t>Accuracy 84 % sur du 85/15</a:t>
-            </a:r>
-            <a:endParaRPr lang="en-US" sz="950" dirty="0"/>
-          </a:p>
-          <a:p>
-            <a:pPr indent="0" marL="0">
-              <a:lnSpc>
-                <a:spcPct val="105000"/>
-              </a:lnSpc>
-              <a:buNone/>
-            </a:pPr>
-            <a:r>
-              <a:rPr lang="en-US" sz="900" dirty="0">
+              <a:t>Tu explores, tu ne sais pas quoi chercher → NON SUPERVISÉ</a:t>
+            </a:r>
+            <a:endParaRPr lang="en-US" sz="1050" dirty="0"/>
+          </a:p>
+          <a:p>
+            <a:pPr indent="0" marL="0">
+              <a:lnSpc>
+                <a:spcPct val="106000"/>
+              </a:lnSpc>
+              <a:buNone/>
+            </a:pPr>
+            <a:r>
+              <a:rPr lang="en-US" sz="1050" b="1" dirty="0">
                 <a:solidFill>
                   <a:srgbClr val="2A3550"/>
                 </a:solidFill>
@@ -41377,159 +41692,9 @@
                 <a:ea typeface="Calibri" pitchFamily="34" charset="-122"/>
                 <a:cs typeface="Calibri" pitchFamily="34" charset="-120"/>
               </a:rPr>
-              <a:t>pire que l'idiot « toujours Deny » — baseline d'abord ! (S3_P1)</a:t>
-            </a:r>
-            <a:endParaRPr lang="en-US" sz="950" dirty="0"/>
-          </a:p>
-        </p:txBody>
-      </p:sp>
-      <p:sp>
-        <p:nvSpPr>
-          <p:cNvPr id="32" name="Shape 30"/>
-          <p:cNvSpPr/>
-          <p:nvPr/>
-        </p:nvSpPr>
-        <p:spPr>
-          <a:xfrm>
-            <a:off x="4681728" y="3931920"/>
-            <a:ext cx="4041648" cy="804672"/>
-          </a:xfrm>
-          <a:prstGeom prst="roundRect">
-            <a:avLst>
-              <a:gd name="adj" fmla="val 6818"/>
-            </a:avLst>
-          </a:prstGeom>
-          <a:solidFill>
-            <a:srgbClr val="EEF4FE"/>
-          </a:solidFill>
-          <a:ln/>
-          <a:effectLst>
-            <a:outerShdw sx="100000" sy="100000" kx="0" ky="0" algn="bl" rotWithShape="0" blurRad="88900" dist="25400" dir="2700000">
-              <a:srgbClr val="000000">
-                <a:alpha val="14000"/>
-              </a:srgbClr>
-            </a:outerShdw>
-          </a:effectLst>
-        </p:spPr>
-      </p:sp>
-      <p:sp>
-        <p:nvSpPr>
-          <p:cNvPr id="33" name="Shape 31"/>
-          <p:cNvSpPr/>
-          <p:nvPr/>
-        </p:nvSpPr>
-        <p:spPr>
-          <a:xfrm>
-            <a:off x="4791456" y="4169664"/>
-            <a:ext cx="329184" cy="329184"/>
-          </a:xfrm>
-          <a:prstGeom prst="ellipse">
-            <a:avLst/>
-          </a:prstGeom>
-          <a:solidFill>
-            <a:srgbClr val="D64550"/>
-          </a:solidFill>
-          <a:ln/>
-        </p:spPr>
-      </p:sp>
-      <p:sp>
-        <p:nvSpPr>
-          <p:cNvPr id="34" name="Text 32"/>
-          <p:cNvSpPr/>
-          <p:nvPr/>
-        </p:nvSpPr>
-        <p:spPr>
-          <a:xfrm>
-            <a:off x="4791456" y="4160520"/>
-            <a:ext cx="329184" cy="329184"/>
-          </a:xfrm>
-          <a:prstGeom prst="rect">
-            <a:avLst/>
-          </a:prstGeom>
-          <a:noFill/>
-          <a:ln/>
-        </p:spPr>
-        <p:txBody>
-          <a:bodyPr wrap="square" lIns="0" tIns="0" rIns="0" bIns="0" rtlCol="0" anchor="ctr"/>
-          <a:lstStyle/>
-          <a:p>
-            <a:pPr algn="ctr" indent="0" marL="0">
-              <a:buNone/>
-            </a:pPr>
-            <a:r>
-              <a:rPr lang="en-US" sz="1300" b="1" dirty="0">
-                <a:solidFill>
-                  <a:srgbClr val="FFFFFF"/>
-                </a:solidFill>
-                <a:latin typeface="Calibri" pitchFamily="34" charset="0"/>
-                <a:ea typeface="Calibri" pitchFamily="34" charset="-122"/>
-                <a:cs typeface="Calibri" pitchFamily="34" charset="-120"/>
-              </a:rPr>
-              <a:t>8</a:t>
-            </a:r>
-            <a:endParaRPr lang="en-US" sz="1300" dirty="0"/>
-          </a:p>
-        </p:txBody>
-      </p:sp>
-      <p:sp>
-        <p:nvSpPr>
-          <p:cNvPr id="35" name="Text 33"/>
-          <p:cNvSpPr/>
-          <p:nvPr/>
-        </p:nvSpPr>
-        <p:spPr>
-          <a:xfrm>
-            <a:off x="5230368" y="4005072"/>
-            <a:ext cx="3401568" cy="685800"/>
-          </a:xfrm>
-          <a:prstGeom prst="rect">
-            <a:avLst/>
-          </a:prstGeom>
-          <a:noFill/>
-          <a:ln/>
-        </p:spPr>
-        <p:txBody>
-          <a:bodyPr wrap="square" lIns="0" tIns="0" rIns="0" bIns="0" rtlCol="0" anchor="t"/>
-          <a:lstStyle/>
-          <a:p>
-            <a:pPr indent="0" marL="0">
-              <a:lnSpc>
-                <a:spcPct val="105000"/>
-              </a:lnSpc>
-              <a:buNone/>
-            </a:pPr>
-            <a:r>
-              <a:rPr lang="en-US" sz="950" b="1" dirty="0">
-                <a:solidFill>
-                  <a:srgbClr val="1E2761"/>
-                </a:solidFill>
-                <a:latin typeface="Courier New" pitchFamily="34" charset="0"/>
-                <a:ea typeface="Courier New" pitchFamily="34" charset="-122"/>
-                <a:cs typeface="Courier New" pitchFamily="34" charset="-120"/>
-              </a:rPr>
-              <a:t>idxmin() → indice, pas valeur</a:t>
-            </a:r>
-            <a:endParaRPr lang="en-US" sz="950" dirty="0"/>
-          </a:p>
-          <a:p>
-            <a:pPr indent="0" marL="0">
-              <a:lnSpc>
-                <a:spcPct val="105000"/>
-              </a:lnSpc>
-              <a:buNone/>
-            </a:pPr>
-            <a:r>
-              <a:rPr lang="en-US" sz="900" dirty="0">
-                <a:solidFill>
-                  <a:srgbClr val="2A3550"/>
-                </a:solidFill>
-                <a:latin typeface="Calibri" pitchFamily="34" charset="0"/>
-                <a:ea typeface="Calibri" pitchFamily="34" charset="-122"/>
-                <a:cs typeface="Calibri" pitchFamily="34" charset="-120"/>
-              </a:rPr>
-              <a:t>ligne 2 = k 3 : le meilleur k n'était pas 2 ! (S4_P1)</a:t>
-            </a:r>
-            <a:endParaRPr lang="en-US" sz="950" dirty="0"/>
+              <a:t>Le clustering sert à DÉCOUVRIR, pas à prédire une cible connue.</a:t>
+            </a:r>
+            <a:endParaRPr lang="en-US" sz="1050" dirty="0"/>
           </a:p>
         </p:txBody>
       </p:sp>
@@ -41544,6 +41709,2941 @@
 <file path=ppt/slides/slide43.xml><?xml version="1.0" encoding="utf-8"?>
 <p:sld xmlns:a="http://schemas.openxmlformats.org/drawingml/2006/main" xmlns:r="http://schemas.openxmlformats.org/officeDocument/2006/relationships" xmlns:p="http://schemas.openxmlformats.org/presentationml/2006/main">
   <p:cSld name="Slide 43">
+    <p:bg>
+      <p:bgPr>
+        <a:solidFill>
+          <a:srgbClr val="1E2761"/>
+        </a:solidFill>
+      </p:bgPr>
+    </p:bg>
+    <p:spTree>
+      <p:nvGrpSpPr>
+        <p:cNvPr id="1" name=""/>
+        <p:cNvGrpSpPr/>
+        <p:nvPr/>
+      </p:nvGrpSpPr>
+      <p:grpSpPr>
+        <a:xfrm>
+          <a:off x="0" y="0"/>
+          <a:ext cx="0" cy="0"/>
+          <a:chOff x="0" y="0"/>
+          <a:chExt cx="0" cy="0"/>
+        </a:xfrm>
+      </p:grpSpPr>
+      <p:sp>
+        <p:nvSpPr>
+          <p:cNvPr id="2" name="Text 0"/>
+          <p:cNvSpPr/>
+          <p:nvPr/>
+        </p:nvSpPr>
+        <p:spPr>
+          <a:xfrm>
+            <a:off x="640080" y="1417320"/>
+            <a:ext cx="7863840" cy="365760"/>
+          </a:xfrm>
+          <a:prstGeom prst="rect">
+            <a:avLst/>
+          </a:prstGeom>
+          <a:noFill/>
+          <a:ln/>
+        </p:spPr>
+        <p:txBody>
+          <a:bodyPr wrap="square" lIns="0" tIns="0" rIns="0" bIns="0" rtlCol="0" anchor="ctr"/>
+          <a:lstStyle/>
+          <a:p>
+            <a:pPr indent="0" marL="0">
+              <a:buNone/>
+            </a:pPr>
+            <a:r>
+              <a:rPr lang="en-US" sz="1500" b="1" spc="400" kern="0" dirty="0">
+                <a:solidFill>
+                  <a:srgbClr val="FFD43B"/>
+                </a:solidFill>
+                <a:latin typeface="Calibri" pitchFamily="34" charset="0"/>
+                <a:ea typeface="Calibri" pitchFamily="34" charset="-122"/>
+                <a:cs typeface="Calibri" pitchFamily="34" charset="-120"/>
+              </a:rPr>
+              <a:t>PARTIE 3</a:t>
+            </a:r>
+            <a:endParaRPr lang="en-US" sz="1500" dirty="0"/>
+          </a:p>
+        </p:txBody>
+      </p:sp>
+      <p:sp>
+        <p:nvSpPr>
+          <p:cNvPr id="3" name="Text 1"/>
+          <p:cNvSpPr/>
+          <p:nvPr/>
+        </p:nvSpPr>
+        <p:spPr>
+          <a:xfrm>
+            <a:off x="640080" y="1828800"/>
+            <a:ext cx="7863840" cy="914400"/>
+          </a:xfrm>
+          <a:prstGeom prst="rect">
+            <a:avLst/>
+          </a:prstGeom>
+          <a:noFill/>
+          <a:ln/>
+        </p:spPr>
+        <p:txBody>
+          <a:bodyPr wrap="square" lIns="0" tIns="0" rIns="0" bIns="0" rtlCol="0" anchor="ctr"/>
+          <a:lstStyle/>
+          <a:p>
+            <a:pPr indent="0" marL="0">
+              <a:buNone/>
+            </a:pPr>
+            <a:r>
+              <a:rPr lang="en-US" sz="4000" b="1" dirty="0">
+                <a:solidFill>
+                  <a:srgbClr val="FFFFFF"/>
+                </a:solidFill>
+                <a:latin typeface="Calibri" pitchFamily="34" charset="0"/>
+                <a:ea typeface="Calibri" pitchFamily="34" charset="-122"/>
+                <a:cs typeface="Calibri" pitchFamily="34" charset="-120"/>
+              </a:rPr>
+              <a:t>Deep Learning</a:t>
+            </a:r>
+            <a:endParaRPr lang="en-US" sz="4000" dirty="0"/>
+          </a:p>
+        </p:txBody>
+      </p:sp>
+      <p:sp>
+        <p:nvSpPr>
+          <p:cNvPr id="4" name="Text 2"/>
+          <p:cNvSpPr/>
+          <p:nvPr/>
+        </p:nvSpPr>
+        <p:spPr>
+          <a:xfrm>
+            <a:off x="640080" y="2880360"/>
+            <a:ext cx="7680960" cy="822960"/>
+          </a:xfrm>
+          <a:prstGeom prst="rect">
+            <a:avLst/>
+          </a:prstGeom>
+          <a:noFill/>
+          <a:ln/>
+        </p:spPr>
+        <p:txBody>
+          <a:bodyPr wrap="square" lIns="0" tIns="0" rIns="0" bIns="0" rtlCol="0" anchor="ctr"/>
+          <a:lstStyle/>
+          <a:p>
+            <a:pPr indent="0" marL="0">
+              <a:lnSpc>
+                <a:spcPct val="120000"/>
+              </a:lnSpc>
+              <a:buNone/>
+            </a:pPr>
+            <a:r>
+              <a:rPr lang="en-US" sz="1350" dirty="0">
+                <a:solidFill>
+                  <a:srgbClr val="CADCFC"/>
+                </a:solidFill>
+                <a:latin typeface="Calibri" pitchFamily="34" charset="0"/>
+                <a:ea typeface="Calibri" pitchFamily="34" charset="-122"/>
+                <a:cs typeface="Calibri" pitchFamily="34" charset="-120"/>
+              </a:rPr>
+              <a:t>Fini scikit-learn et ses modèles tout faits : avec PyTorch tu construis le réseau</a:t>
+            </a:r>
+            <a:endParaRPr lang="en-US" sz="1350" dirty="0"/>
+          </a:p>
+          <a:p>
+            <a:pPr indent="0" marL="0">
+              <a:lnSpc>
+                <a:spcPct val="120000"/>
+              </a:lnSpc>
+              <a:buNone/>
+            </a:pPr>
+            <a:r>
+              <a:rPr lang="en-US" sz="1350" dirty="0">
+                <a:solidFill>
+                  <a:srgbClr val="CADCFC"/>
+                </a:solidFill>
+                <a:latin typeface="Calibri" pitchFamily="34" charset="0"/>
+                <a:ea typeface="Calibri" pitchFamily="34" charset="-122"/>
+                <a:cs typeface="Calibri" pitchFamily="34" charset="-120"/>
+              </a:rPr>
+              <a:t>brique par brique et tu écris ta propre boucle d'entraînement. Notebook S9_P2.</a:t>
+            </a:r>
+            <a:endParaRPr lang="en-US" sz="1350" dirty="0"/>
+          </a:p>
+        </p:txBody>
+      </p:sp>
+    </p:spTree>
+  </p:cSld>
+  <p:clrMapOvr>
+    <a:masterClrMapping/>
+  </p:clrMapOvr>
+</p:sld>
+</file>
+
+<file path=ppt/slides/slide44.xml><?xml version="1.0" encoding="utf-8"?>
+<p:sld xmlns:a="http://schemas.openxmlformats.org/drawingml/2006/main" xmlns:r="http://schemas.openxmlformats.org/officeDocument/2006/relationships" xmlns:p="http://schemas.openxmlformats.org/presentationml/2006/main">
+  <p:cSld name="Slide 44">
+    <p:bg>
+      <p:bgPr>
+        <a:solidFill>
+          <a:srgbClr val="FFFFFF"/>
+        </a:solidFill>
+      </p:bgPr>
+    </p:bg>
+    <p:spTree>
+      <p:nvGrpSpPr>
+        <p:cNvPr id="1" name=""/>
+        <p:cNvGrpSpPr/>
+        <p:nvPr/>
+      </p:nvGrpSpPr>
+      <p:grpSpPr>
+        <a:xfrm>
+          <a:off x="0" y="0"/>
+          <a:ext cx="0" cy="0"/>
+          <a:chOff x="0" y="0"/>
+          <a:chExt cx="0" cy="0"/>
+        </a:xfrm>
+      </p:grpSpPr>
+      <p:sp>
+        <p:nvSpPr>
+          <p:cNvPr id="2" name="Text 0"/>
+          <p:cNvSpPr/>
+          <p:nvPr/>
+        </p:nvSpPr>
+        <p:spPr>
+          <a:xfrm>
+            <a:off x="457200" y="201168"/>
+            <a:ext cx="8229600" cy="256032"/>
+          </a:xfrm>
+          <a:prstGeom prst="rect">
+            <a:avLst/>
+          </a:prstGeom>
+          <a:noFill/>
+          <a:ln/>
+        </p:spPr>
+        <p:txBody>
+          <a:bodyPr wrap="square" lIns="0" tIns="0" rIns="0" bIns="0" rtlCol="0" anchor="ctr"/>
+          <a:lstStyle/>
+          <a:p>
+            <a:pPr indent="0" marL="0">
+              <a:buNone/>
+            </a:pPr>
+            <a:r>
+              <a:rPr lang="en-US" sz="1100" b="1" spc="200" kern="0" dirty="0">
+                <a:solidFill>
+                  <a:srgbClr val="9C7A00"/>
+                </a:solidFill>
+                <a:latin typeface="Calibri" pitchFamily="34" charset="0"/>
+                <a:ea typeface="Calibri" pitchFamily="34" charset="-122"/>
+                <a:cs typeface="Calibri" pitchFamily="34" charset="-120"/>
+              </a:rPr>
+              <a:t>S9_P2 · DEEP_LEARNING/</a:t>
+            </a:r>
+            <a:endParaRPr lang="en-US" sz="1100" dirty="0"/>
+          </a:p>
+        </p:txBody>
+      </p:sp>
+      <p:sp>
+        <p:nvSpPr>
+          <p:cNvPr id="3" name="Text 1"/>
+          <p:cNvSpPr/>
+          <p:nvPr/>
+        </p:nvSpPr>
+        <p:spPr>
+          <a:xfrm>
+            <a:off x="457200" y="438912"/>
+            <a:ext cx="8229600" cy="566928"/>
+          </a:xfrm>
+          <a:prstGeom prst="rect">
+            <a:avLst/>
+          </a:prstGeom>
+          <a:noFill/>
+          <a:ln/>
+        </p:spPr>
+        <p:txBody>
+          <a:bodyPr wrap="square" lIns="0" tIns="0" rIns="0" bIns="0" rtlCol="0" anchor="ctr"/>
+          <a:lstStyle/>
+          <a:p>
+            <a:pPr indent="0" marL="0">
+              <a:buNone/>
+            </a:pPr>
+            <a:r>
+              <a:rPr lang="en-US" sz="2700" b="1" dirty="0">
+                <a:solidFill>
+                  <a:srgbClr val="1E2761"/>
+                </a:solidFill>
+                <a:latin typeface="Calibri" pitchFamily="34" charset="0"/>
+                <a:ea typeface="Calibri" pitchFamily="34" charset="-122"/>
+                <a:cs typeface="Calibri" pitchFamily="34" charset="-120"/>
+              </a:rPr>
+              <a:t>PyTorch : tenseurs, autograd &amp; la boucle</a:t>
+            </a:r>
+            <a:endParaRPr lang="en-US" sz="2700" dirty="0"/>
+          </a:p>
+        </p:txBody>
+      </p:sp>
+      <p:sp>
+        <p:nvSpPr>
+          <p:cNvPr id="4" name="Shape 2"/>
+          <p:cNvSpPr/>
+          <p:nvPr/>
+        </p:nvSpPr>
+        <p:spPr>
+          <a:xfrm>
+            <a:off x="457200" y="1188720"/>
+            <a:ext cx="4206240" cy="2148840"/>
+          </a:xfrm>
+          <a:prstGeom prst="roundRect">
+            <a:avLst>
+              <a:gd name="adj" fmla="val 2979"/>
+            </a:avLst>
+          </a:prstGeom>
+          <a:solidFill>
+            <a:srgbClr val="141E3C"/>
+          </a:solidFill>
+          <a:ln/>
+          <a:effectLst>
+            <a:outerShdw sx="100000" sy="100000" kx="0" ky="0" algn="bl" rotWithShape="0" blurRad="88900" dist="25400" dir="2700000">
+              <a:srgbClr val="000000">
+                <a:alpha val="14000"/>
+              </a:srgbClr>
+            </a:outerShdw>
+          </a:effectLst>
+        </p:spPr>
+      </p:sp>
+      <p:sp>
+        <p:nvSpPr>
+          <p:cNvPr id="5" name="Shape 3"/>
+          <p:cNvSpPr/>
+          <p:nvPr/>
+        </p:nvSpPr>
+        <p:spPr>
+          <a:xfrm>
+            <a:off x="585216" y="1307592"/>
+            <a:ext cx="64008" cy="64008"/>
+          </a:xfrm>
+          <a:prstGeom prst="ellipse">
+            <a:avLst/>
+          </a:prstGeom>
+          <a:solidFill>
+            <a:srgbClr val="E8604C"/>
+          </a:solidFill>
+          <a:ln/>
+        </p:spPr>
+      </p:sp>
+      <p:sp>
+        <p:nvSpPr>
+          <p:cNvPr id="6" name="Shape 4"/>
+          <p:cNvSpPr/>
+          <p:nvPr/>
+        </p:nvSpPr>
+        <p:spPr>
+          <a:xfrm>
+            <a:off x="713232" y="1307592"/>
+            <a:ext cx="64008" cy="64008"/>
+          </a:xfrm>
+          <a:prstGeom prst="ellipse">
+            <a:avLst/>
+          </a:prstGeom>
+          <a:solidFill>
+            <a:srgbClr val="F2B233"/>
+          </a:solidFill>
+          <a:ln/>
+        </p:spPr>
+      </p:sp>
+      <p:sp>
+        <p:nvSpPr>
+          <p:cNvPr id="7" name="Shape 5"/>
+          <p:cNvSpPr/>
+          <p:nvPr/>
+        </p:nvSpPr>
+        <p:spPr>
+          <a:xfrm>
+            <a:off x="841248" y="1307592"/>
+            <a:ext cx="64008" cy="64008"/>
+          </a:xfrm>
+          <a:prstGeom prst="ellipse">
+            <a:avLst/>
+          </a:prstGeom>
+          <a:solidFill>
+            <a:srgbClr val="5BBB63"/>
+          </a:solidFill>
+          <a:ln/>
+        </p:spPr>
+      </p:sp>
+      <p:sp>
+        <p:nvSpPr>
+          <p:cNvPr id="8" name="Text 6"/>
+          <p:cNvSpPr/>
+          <p:nvPr/>
+        </p:nvSpPr>
+        <p:spPr>
+          <a:xfrm>
+            <a:off x="621792" y="1463040"/>
+            <a:ext cx="3877056" cy="1764792"/>
+          </a:xfrm>
+          <a:prstGeom prst="rect">
+            <a:avLst/>
+          </a:prstGeom>
+          <a:noFill/>
+          <a:ln/>
+        </p:spPr>
+        <p:txBody>
+          <a:bodyPr wrap="square" lIns="0" tIns="0" rIns="0" bIns="0" rtlCol="0" anchor="t"/>
+          <a:lstStyle/>
+          <a:p>
+            <a:pPr indent="0" marL="0">
+              <a:lnSpc>
+                <a:spcPct val="112000"/>
+              </a:lnSpc>
+              <a:buNone/>
+            </a:pPr>
+            <a:r>
+              <a:rPr lang="en-US" sz="1050" dirty="0">
+                <a:solidFill>
+                  <a:srgbClr val="7C93C4"/>
+                </a:solidFill>
+                <a:latin typeface="Courier New" pitchFamily="34" charset="0"/>
+                <a:ea typeface="Courier New" pitchFamily="34" charset="-122"/>
+                <a:cs typeface="Courier New" pitchFamily="34" charset="-120"/>
+              </a:rPr>
+              <a:t># LES 5 LIGNES SACREES</a:t>
+            </a:r>
+            <a:endParaRPr lang="en-US" sz="1050" dirty="0"/>
+          </a:p>
+          <a:p>
+            <a:pPr indent="0" marL="0">
+              <a:lnSpc>
+                <a:spcPct val="112000"/>
+              </a:lnSpc>
+              <a:buNone/>
+            </a:pPr>
+            <a:r>
+              <a:rPr lang="en-US" sz="1050" dirty="0">
+                <a:solidFill>
+                  <a:srgbClr val="DCE7FA"/>
+                </a:solidFill>
+                <a:latin typeface="Courier New" pitchFamily="34" charset="0"/>
+                <a:ea typeface="Courier New" pitchFamily="34" charset="-122"/>
+                <a:cs typeface="Courier New" pitchFamily="34" charset="-120"/>
+              </a:rPr>
+              <a:t>pred = model(batch_x)          </a:t>
+            </a:r>
+            <a:pPr indent="0" marL="0">
+              <a:lnSpc>
+                <a:spcPct val="112000"/>
+              </a:lnSpc>
+              <a:buNone/>
+            </a:pPr>
+            <a:r>
+              <a:rPr lang="en-US" sz="1050" dirty="0">
+                <a:solidFill>
+                  <a:srgbClr val="7C93C4"/>
+                </a:solidFill>
+                <a:latin typeface="Courier New" pitchFamily="34" charset="0"/>
+                <a:ea typeface="Courier New" pitchFamily="34" charset="-122"/>
+                <a:cs typeface="Courier New" pitchFamily="34" charset="-120"/>
+              </a:rPr>
+              <a:t># 1. forward</a:t>
+            </a:r>
+            <a:endParaRPr lang="en-US" sz="1050" dirty="0"/>
+          </a:p>
+          <a:p>
+            <a:pPr indent="0" marL="0">
+              <a:lnSpc>
+                <a:spcPct val="112000"/>
+              </a:lnSpc>
+              <a:buNone/>
+            </a:pPr>
+            <a:r>
+              <a:rPr lang="en-US" sz="1050" dirty="0">
+                <a:solidFill>
+                  <a:srgbClr val="DCE7FA"/>
+                </a:solidFill>
+                <a:latin typeface="Courier New" pitchFamily="34" charset="0"/>
+                <a:ea typeface="Courier New" pitchFamily="34" charset="-122"/>
+                <a:cs typeface="Courier New" pitchFamily="34" charset="-120"/>
+              </a:rPr>
+              <a:t>loss = loss_fn(pred, batch_y)  </a:t>
+            </a:r>
+            <a:pPr indent="0" marL="0">
+              <a:lnSpc>
+                <a:spcPct val="112000"/>
+              </a:lnSpc>
+              <a:buNone/>
+            </a:pPr>
+            <a:r>
+              <a:rPr lang="en-US" sz="1050" dirty="0">
+                <a:solidFill>
+                  <a:srgbClr val="7C93C4"/>
+                </a:solidFill>
+                <a:latin typeface="Courier New" pitchFamily="34" charset="0"/>
+                <a:ea typeface="Courier New" pitchFamily="34" charset="-122"/>
+                <a:cs typeface="Courier New" pitchFamily="34" charset="-120"/>
+              </a:rPr>
+              <a:t># 2. l'erreur</a:t>
+            </a:r>
+            <a:endParaRPr lang="en-US" sz="1050" dirty="0"/>
+          </a:p>
+          <a:p>
+            <a:pPr indent="0" marL="0">
+              <a:lnSpc>
+                <a:spcPct val="112000"/>
+              </a:lnSpc>
+              <a:buNone/>
+            </a:pPr>
+            <a:r>
+              <a:rPr lang="en-US" sz="1050" dirty="0">
+                <a:solidFill>
+                  <a:srgbClr val="DCE7FA"/>
+                </a:solidFill>
+                <a:latin typeface="Courier New" pitchFamily="34" charset="0"/>
+                <a:ea typeface="Courier New" pitchFamily="34" charset="-122"/>
+                <a:cs typeface="Courier New" pitchFamily="34" charset="-120"/>
+              </a:rPr>
+              <a:t>optimizer.zero_grad()          </a:t>
+            </a:r>
+            <a:pPr indent="0" marL="0">
+              <a:lnSpc>
+                <a:spcPct val="112000"/>
+              </a:lnSpc>
+              <a:buNone/>
+            </a:pPr>
+            <a:r>
+              <a:rPr lang="en-US" sz="1050" dirty="0">
+                <a:solidFill>
+                  <a:srgbClr val="FF9B8E"/>
+                </a:solidFill>
+                <a:latin typeface="Courier New" pitchFamily="34" charset="0"/>
+                <a:ea typeface="Courier New" pitchFamily="34" charset="-122"/>
+                <a:cs typeface="Courier New" pitchFamily="34" charset="-120"/>
+              </a:rPr>
+              <a:t># 3. RESET !</a:t>
+            </a:r>
+            <a:endParaRPr lang="en-US" sz="1050" dirty="0"/>
+          </a:p>
+          <a:p>
+            <a:pPr indent="0" marL="0">
+              <a:lnSpc>
+                <a:spcPct val="112000"/>
+              </a:lnSpc>
+              <a:buNone/>
+            </a:pPr>
+            <a:r>
+              <a:rPr lang="en-US" sz="1050" dirty="0">
+                <a:solidFill>
+                  <a:srgbClr val="DCE7FA"/>
+                </a:solidFill>
+                <a:latin typeface="Courier New" pitchFamily="34" charset="0"/>
+                <a:ea typeface="Courier New" pitchFamily="34" charset="-122"/>
+                <a:cs typeface="Courier New" pitchFamily="34" charset="-120"/>
+              </a:rPr>
+              <a:t>loss.backward()                </a:t>
+            </a:r>
+            <a:pPr indent="0" marL="0">
+              <a:lnSpc>
+                <a:spcPct val="112000"/>
+              </a:lnSpc>
+              <a:buNone/>
+            </a:pPr>
+            <a:r>
+              <a:rPr lang="en-US" sz="1050" dirty="0">
+                <a:solidFill>
+                  <a:srgbClr val="7C93C4"/>
+                </a:solidFill>
+                <a:latin typeface="Courier New" pitchFamily="34" charset="0"/>
+                <a:ea typeface="Courier New" pitchFamily="34" charset="-122"/>
+                <a:cs typeface="Courier New" pitchFamily="34" charset="-120"/>
+              </a:rPr>
+              <a:t># 4. les derivees</a:t>
+            </a:r>
+            <a:endParaRPr lang="en-US" sz="1050" dirty="0"/>
+          </a:p>
+          <a:p>
+            <a:pPr indent="0" marL="0">
+              <a:lnSpc>
+                <a:spcPct val="112000"/>
+              </a:lnSpc>
+              <a:buNone/>
+            </a:pPr>
+            <a:r>
+              <a:rPr lang="en-US" sz="1050" dirty="0">
+                <a:solidFill>
+                  <a:srgbClr val="DCE7FA"/>
+                </a:solidFill>
+                <a:latin typeface="Courier New" pitchFamily="34" charset="0"/>
+                <a:ea typeface="Courier New" pitchFamily="34" charset="-122"/>
+                <a:cs typeface="Courier New" pitchFamily="34" charset="-120"/>
+              </a:rPr>
+              <a:t>optimizer.step()               </a:t>
+            </a:r>
+            <a:pPr indent="0" marL="0">
+              <a:lnSpc>
+                <a:spcPct val="112000"/>
+              </a:lnSpc>
+              <a:buNone/>
+            </a:pPr>
+            <a:r>
+              <a:rPr lang="en-US" sz="1050" dirty="0">
+                <a:solidFill>
+                  <a:srgbClr val="7C93C4"/>
+                </a:solidFill>
+                <a:latin typeface="Courier New" pitchFamily="34" charset="0"/>
+                <a:ea typeface="Courier New" pitchFamily="34" charset="-122"/>
+                <a:cs typeface="Courier New" pitchFamily="34" charset="-120"/>
+              </a:rPr>
+              <a:t># 5. ajuster</a:t>
+            </a:r>
+            <a:endParaRPr lang="en-US" sz="1050" dirty="0"/>
+          </a:p>
+        </p:txBody>
+      </p:sp>
+      <p:sp>
+        <p:nvSpPr>
+          <p:cNvPr id="9" name="Shape 7"/>
+          <p:cNvSpPr/>
+          <p:nvPr/>
+        </p:nvSpPr>
+        <p:spPr>
+          <a:xfrm>
+            <a:off x="457200" y="3520440"/>
+            <a:ext cx="4206240" cy="1280160"/>
+          </a:xfrm>
+          <a:prstGeom prst="roundRect">
+            <a:avLst>
+              <a:gd name="adj" fmla="val 4286"/>
+            </a:avLst>
+          </a:prstGeom>
+          <a:solidFill>
+            <a:srgbClr val="FFF6DD"/>
+          </a:solidFill>
+          <a:ln/>
+          <a:effectLst>
+            <a:outerShdw sx="100000" sy="100000" kx="0" ky="0" algn="bl" rotWithShape="0" blurRad="88900" dist="25400" dir="2700000">
+              <a:srgbClr val="000000">
+                <a:alpha val="14000"/>
+              </a:srgbClr>
+            </a:outerShdw>
+          </a:effectLst>
+        </p:spPr>
+      </p:sp>
+      <p:sp>
+        <p:nvSpPr>
+          <p:cNvPr id="10" name="Text 8"/>
+          <p:cNvSpPr/>
+          <p:nvPr/>
+        </p:nvSpPr>
+        <p:spPr>
+          <a:xfrm>
+            <a:off x="603504" y="3630168"/>
+            <a:ext cx="3913632" cy="274320"/>
+          </a:xfrm>
+          <a:prstGeom prst="rect">
+            <a:avLst/>
+          </a:prstGeom>
+          <a:noFill/>
+          <a:ln/>
+        </p:spPr>
+        <p:txBody>
+          <a:bodyPr wrap="square" lIns="0" tIns="0" rIns="0" bIns="0" rtlCol="0" anchor="ctr"/>
+          <a:lstStyle/>
+          <a:p>
+            <a:pPr indent="0" marL="0">
+              <a:buNone/>
+            </a:pPr>
+            <a:r>
+              <a:rPr lang="en-US" sz="1250" b="1" dirty="0">
+                <a:solidFill>
+                  <a:srgbClr val="1E2761"/>
+                </a:solidFill>
+                <a:latin typeface="Calibri" pitchFamily="34" charset="0"/>
+                <a:ea typeface="Calibri" pitchFamily="34" charset="-122"/>
+                <a:cs typeface="Calibri" pitchFamily="34" charset="-120"/>
+              </a:rPr>
+              <a:t>⚠️ zero_grad() est OBLIGATOIRE</a:t>
+            </a:r>
+            <a:endParaRPr lang="en-US" sz="1250" dirty="0"/>
+          </a:p>
+        </p:txBody>
+      </p:sp>
+      <p:sp>
+        <p:nvSpPr>
+          <p:cNvPr id="11" name="Text 9"/>
+          <p:cNvSpPr/>
+          <p:nvPr/>
+        </p:nvSpPr>
+        <p:spPr>
+          <a:xfrm>
+            <a:off x="603504" y="3922776"/>
+            <a:ext cx="3913632" cy="768096"/>
+          </a:xfrm>
+          <a:prstGeom prst="rect">
+            <a:avLst/>
+          </a:prstGeom>
+          <a:noFill/>
+          <a:ln/>
+        </p:spPr>
+        <p:txBody>
+          <a:bodyPr wrap="square" lIns="0" tIns="0" rIns="0" bIns="0" rtlCol="0" anchor="t"/>
+          <a:lstStyle/>
+          <a:p>
+            <a:pPr indent="0" marL="0">
+              <a:lnSpc>
+                <a:spcPct val="106000"/>
+              </a:lnSpc>
+              <a:buNone/>
+            </a:pPr>
+            <a:r>
+              <a:rPr lang="en-US" sz="1000" dirty="0">
+                <a:solidFill>
+                  <a:srgbClr val="2A3550"/>
+                </a:solidFill>
+                <a:latin typeface="Calibri" pitchFamily="34" charset="0"/>
+                <a:ea typeface="Calibri" pitchFamily="34" charset="-122"/>
+                <a:cs typeface="Calibri" pitchFamily="34" charset="-120"/>
+              </a:rPr>
+              <a:t>PyTorch ACCUMULE les gradients par défaut. Si tu l'oublies, les dérivées de tous les tours s'additionnent → l'entraînement part en vrille. L'oubli n°1 des débutants.</a:t>
+            </a:r>
+            <a:endParaRPr lang="en-US" sz="1050" dirty="0"/>
+          </a:p>
+        </p:txBody>
+      </p:sp>
+      <p:sp>
+        <p:nvSpPr>
+          <p:cNvPr id="12" name="Shape 10"/>
+          <p:cNvSpPr/>
+          <p:nvPr/>
+        </p:nvSpPr>
+        <p:spPr>
+          <a:xfrm>
+            <a:off x="4846320" y="1188720"/>
+            <a:ext cx="3840480" cy="1691640"/>
+          </a:xfrm>
+          <a:prstGeom prst="roundRect">
+            <a:avLst>
+              <a:gd name="adj" fmla="val 3243"/>
+            </a:avLst>
+          </a:prstGeom>
+          <a:solidFill>
+            <a:srgbClr val="E9FAF5"/>
+          </a:solidFill>
+          <a:ln/>
+          <a:effectLst>
+            <a:outerShdw sx="100000" sy="100000" kx="0" ky="0" algn="bl" rotWithShape="0" blurRad="88900" dist="25400" dir="2700000">
+              <a:srgbClr val="000000">
+                <a:alpha val="14000"/>
+              </a:srgbClr>
+            </a:outerShdw>
+          </a:effectLst>
+        </p:spPr>
+      </p:sp>
+      <p:sp>
+        <p:nvSpPr>
+          <p:cNvPr id="13" name="Text 11"/>
+          <p:cNvSpPr/>
+          <p:nvPr/>
+        </p:nvSpPr>
+        <p:spPr>
+          <a:xfrm>
+            <a:off x="4992624" y="1298448"/>
+            <a:ext cx="3547872" cy="274320"/>
+          </a:xfrm>
+          <a:prstGeom prst="rect">
+            <a:avLst/>
+          </a:prstGeom>
+          <a:noFill/>
+          <a:ln/>
+        </p:spPr>
+        <p:txBody>
+          <a:bodyPr wrap="square" lIns="0" tIns="0" rIns="0" bIns="0" rtlCol="0" anchor="ctr"/>
+          <a:lstStyle/>
+          <a:p>
+            <a:pPr indent="0" marL="0">
+              <a:buNone/>
+            </a:pPr>
+            <a:r>
+              <a:rPr lang="en-US" sz="1250" b="1" dirty="0">
+                <a:solidFill>
+                  <a:srgbClr val="1E2761"/>
+                </a:solidFill>
+                <a:latin typeface="Calibri" pitchFamily="34" charset="0"/>
+                <a:ea typeface="Calibri" pitchFamily="34" charset="-122"/>
+                <a:cs typeface="Calibri" pitchFamily="34" charset="-120"/>
+              </a:rPr>
+              <a:t>⭐ L'AUTOGRAD : le cœur de tout</a:t>
+            </a:r>
+            <a:endParaRPr lang="en-US" sz="1250" dirty="0"/>
+          </a:p>
+        </p:txBody>
+      </p:sp>
+      <p:sp>
+        <p:nvSpPr>
+          <p:cNvPr id="14" name="Text 12"/>
+          <p:cNvSpPr/>
+          <p:nvPr/>
+        </p:nvSpPr>
+        <p:spPr>
+          <a:xfrm>
+            <a:off x="4992624" y="1591056"/>
+            <a:ext cx="3547872" cy="1179576"/>
+          </a:xfrm>
+          <a:prstGeom prst="rect">
+            <a:avLst/>
+          </a:prstGeom>
+          <a:noFill/>
+          <a:ln/>
+        </p:spPr>
+        <p:txBody>
+          <a:bodyPr wrap="square" lIns="0" tIns="0" rIns="0" bIns="0" rtlCol="0" anchor="t"/>
+          <a:lstStyle/>
+          <a:p>
+            <a:pPr indent="0" marL="0">
+              <a:lnSpc>
+                <a:spcPct val="106000"/>
+              </a:lnSpc>
+              <a:buNone/>
+            </a:pPr>
+            <a:r>
+              <a:rPr lang="en-US" sz="850" dirty="0">
+                <a:solidFill>
+                  <a:srgbClr val="1E2761"/>
+                </a:solidFill>
+                <a:latin typeface="Courier New" pitchFamily="34" charset="0"/>
+                <a:ea typeface="Courier New" pitchFamily="34" charset="-122"/>
+                <a:cs typeface="Courier New" pitchFamily="34" charset="-120"/>
+              </a:rPr>
+              <a:t>x = torch.tensor(2.0, requires_grad=True)</a:t>
+            </a:r>
+            <a:endParaRPr lang="en-US" sz="1050" dirty="0"/>
+          </a:p>
+          <a:p>
+            <a:pPr indent="0" marL="0">
+              <a:lnSpc>
+                <a:spcPct val="106000"/>
+              </a:lnSpc>
+              <a:buNone/>
+            </a:pPr>
+            <a:r>
+              <a:rPr lang="en-US" sz="850" dirty="0">
+                <a:solidFill>
+                  <a:srgbClr val="1E2761"/>
+                </a:solidFill>
+                <a:latin typeface="Courier New" pitchFamily="34" charset="0"/>
+                <a:ea typeface="Courier New" pitchFamily="34" charset="-122"/>
+                <a:cs typeface="Courier New" pitchFamily="34" charset="-120"/>
+              </a:rPr>
+              <a:t>y = x**2 + 3*x + 1  ;  y.backward()  →  x.grad</a:t>
+            </a:r>
+            <a:endParaRPr lang="en-US" sz="1050" dirty="0"/>
+          </a:p>
+          <a:p>
+            <a:pPr indent="0" marL="0">
+              <a:lnSpc>
+                <a:spcPct val="106000"/>
+              </a:lnSpc>
+              <a:buNone/>
+            </a:pPr>
+            <a:r>
+              <a:rPr lang="en-US" sz="1000" dirty="0">
+                <a:solidFill>
+                  <a:srgbClr val="2A3550"/>
+                </a:solidFill>
+                <a:latin typeface="Calibri" pitchFamily="34" charset="0"/>
+                <a:ea typeface="Calibri" pitchFamily="34" charset="-122"/>
+                <a:cs typeface="Calibri" pitchFamily="34" charset="-120"/>
+              </a:rPr>
+              <a:t>y' = 2x+3, en x=2 → 7. PyTorch affiche 7.0 ✅ La rétropropagation, gratuitement. C'est ce qui rend le deep learning praticable (des milliards de paramètres à dériver).</a:t>
+            </a:r>
+            <a:endParaRPr lang="en-US" sz="1050" dirty="0"/>
+          </a:p>
+        </p:txBody>
+      </p:sp>
+      <p:sp>
+        <p:nvSpPr>
+          <p:cNvPr id="15" name="Shape 13"/>
+          <p:cNvSpPr/>
+          <p:nvPr/>
+        </p:nvSpPr>
+        <p:spPr>
+          <a:xfrm>
+            <a:off x="4846320" y="3063240"/>
+            <a:ext cx="3840480" cy="914400"/>
+          </a:xfrm>
+          <a:prstGeom prst="roundRect">
+            <a:avLst>
+              <a:gd name="adj" fmla="val 6000"/>
+            </a:avLst>
+          </a:prstGeom>
+          <a:solidFill>
+            <a:srgbClr val="EEF4FE"/>
+          </a:solidFill>
+          <a:ln/>
+          <a:effectLst>
+            <a:outerShdw sx="100000" sy="100000" kx="0" ky="0" algn="bl" rotWithShape="0" blurRad="88900" dist="25400" dir="2700000">
+              <a:srgbClr val="000000">
+                <a:alpha val="14000"/>
+              </a:srgbClr>
+            </a:outerShdw>
+          </a:effectLst>
+        </p:spPr>
+      </p:sp>
+      <p:sp>
+        <p:nvSpPr>
+          <p:cNvPr id="16" name="Text 14"/>
+          <p:cNvSpPr/>
+          <p:nvPr/>
+        </p:nvSpPr>
+        <p:spPr>
+          <a:xfrm>
+            <a:off x="4992624" y="3172968"/>
+            <a:ext cx="3547872" cy="274320"/>
+          </a:xfrm>
+          <a:prstGeom prst="rect">
+            <a:avLst/>
+          </a:prstGeom>
+          <a:noFill/>
+          <a:ln/>
+        </p:spPr>
+        <p:txBody>
+          <a:bodyPr wrap="square" lIns="0" tIns="0" rIns="0" bIns="0" rtlCol="0" anchor="ctr"/>
+          <a:lstStyle/>
+          <a:p>
+            <a:pPr indent="0" marL="0">
+              <a:buNone/>
+            </a:pPr>
+            <a:r>
+              <a:rPr lang="en-US" sz="1250" b="1" dirty="0">
+                <a:solidFill>
+                  <a:srgbClr val="1E2761"/>
+                </a:solidFill>
+                <a:latin typeface="Calibri" pitchFamily="34" charset="0"/>
+                <a:ea typeface="Calibri" pitchFamily="34" charset="-122"/>
+                <a:cs typeface="Calibri" pitchFamily="34" charset="-120"/>
+              </a:rPr>
+              <a:t>Sans activation, pas de deep learning</a:t>
+            </a:r>
+            <a:endParaRPr lang="en-US" sz="1250" dirty="0"/>
+          </a:p>
+        </p:txBody>
+      </p:sp>
+      <p:sp>
+        <p:nvSpPr>
+          <p:cNvPr id="17" name="Text 15"/>
+          <p:cNvSpPr/>
+          <p:nvPr/>
+        </p:nvSpPr>
+        <p:spPr>
+          <a:xfrm>
+            <a:off x="4992624" y="3465576"/>
+            <a:ext cx="3547872" cy="402336"/>
+          </a:xfrm>
+          <a:prstGeom prst="rect">
+            <a:avLst/>
+          </a:prstGeom>
+          <a:noFill/>
+          <a:ln/>
+        </p:spPr>
+        <p:txBody>
+          <a:bodyPr wrap="square" lIns="0" tIns="0" rIns="0" bIns="0" rtlCol="0" anchor="t"/>
+          <a:lstStyle/>
+          <a:p>
+            <a:pPr indent="0" marL="0">
+              <a:lnSpc>
+                <a:spcPct val="106000"/>
+              </a:lnSpc>
+              <a:buNone/>
+            </a:pPr>
+            <a:r>
+              <a:rPr lang="en-US" sz="950" dirty="0">
+                <a:solidFill>
+                  <a:srgbClr val="2A3550"/>
+                </a:solidFill>
+                <a:latin typeface="Calibri" pitchFamily="34" charset="0"/>
+                <a:ea typeface="Calibri" pitchFamily="34" charset="-122"/>
+                <a:cs typeface="Calibri" pitchFamily="34" charset="-120"/>
+              </a:rPr>
+              <a:t>Empiler 2 couches linéaires reste LINÉAIRE. La ReLU introduit la non-linéarité — c'est elle qui permet d'apprendre des relations complexes.</a:t>
+            </a:r>
+            <a:endParaRPr lang="en-US" sz="1050" dirty="0"/>
+          </a:p>
+        </p:txBody>
+      </p:sp>
+      <p:sp>
+        <p:nvSpPr>
+          <p:cNvPr id="18" name="Shape 16"/>
+          <p:cNvSpPr/>
+          <p:nvPr/>
+        </p:nvSpPr>
+        <p:spPr>
+          <a:xfrm>
+            <a:off x="4846320" y="4114800"/>
+            <a:ext cx="3840480" cy="685800"/>
+          </a:xfrm>
+          <a:prstGeom prst="roundRect">
+            <a:avLst>
+              <a:gd name="adj" fmla="val 8000"/>
+            </a:avLst>
+          </a:prstGeom>
+          <a:solidFill>
+            <a:srgbClr val="EEF4FE"/>
+          </a:solidFill>
+          <a:ln/>
+          <a:effectLst>
+            <a:outerShdw sx="100000" sy="100000" kx="0" ky="0" algn="bl" rotWithShape="0" blurRad="88900" dist="25400" dir="2700000">
+              <a:srgbClr val="000000">
+                <a:alpha val="14000"/>
+              </a:srgbClr>
+            </a:outerShdw>
+          </a:effectLst>
+        </p:spPr>
+      </p:sp>
+      <p:sp>
+        <p:nvSpPr>
+          <p:cNvPr id="19" name="Text 17"/>
+          <p:cNvSpPr/>
+          <p:nvPr/>
+        </p:nvSpPr>
+        <p:spPr>
+          <a:xfrm>
+            <a:off x="4992624" y="4224528"/>
+            <a:ext cx="3547872" cy="466344"/>
+          </a:xfrm>
+          <a:prstGeom prst="rect">
+            <a:avLst/>
+          </a:prstGeom>
+          <a:noFill/>
+          <a:ln/>
+        </p:spPr>
+        <p:txBody>
+          <a:bodyPr wrap="square" lIns="0" tIns="0" rIns="0" bIns="0" rtlCol="0" anchor="t"/>
+          <a:lstStyle/>
+          <a:p>
+            <a:pPr indent="0" marL="0">
+              <a:lnSpc>
+                <a:spcPct val="106000"/>
+              </a:lnSpc>
+              <a:buNone/>
+            </a:pPr>
+            <a:r>
+              <a:rPr lang="en-US" sz="950" b="1" dirty="0">
+                <a:solidFill>
+                  <a:srgbClr val="2A3550"/>
+                </a:solidFill>
+                <a:latin typeface="Calibri" pitchFamily="34" charset="0"/>
+                <a:ea typeface="Calibri" pitchFamily="34" charset="-122"/>
+                <a:cs typeface="Calibri" pitchFamily="34" charset="-120"/>
+              </a:rPr>
+              <a:t>.to(device) : rien ne part sur le GPU tout seul — modèle ET données au même endroit !</a:t>
+            </a:r>
+            <a:endParaRPr lang="en-US" sz="1050" dirty="0"/>
+          </a:p>
+        </p:txBody>
+      </p:sp>
+    </p:spTree>
+  </p:cSld>
+  <p:clrMapOvr>
+    <a:masterClrMapping/>
+  </p:clrMapOvr>
+</p:sld>
+</file>
+
+<file path=ppt/slides/slide45.xml><?xml version="1.0" encoding="utf-8"?>
+<p:sld xmlns:a="http://schemas.openxmlformats.org/drawingml/2006/main" xmlns:r="http://schemas.openxmlformats.org/officeDocument/2006/relationships" xmlns:p="http://schemas.openxmlformats.org/presentationml/2006/main">
+  <p:cSld name="Slide 45">
+    <p:bg>
+      <p:bgPr>
+        <a:solidFill>
+          <a:srgbClr val="FFFFFF"/>
+        </a:solidFill>
+      </p:bgPr>
+    </p:bg>
+    <p:spTree>
+      <p:nvGrpSpPr>
+        <p:cNvPr id="1" name=""/>
+        <p:cNvGrpSpPr/>
+        <p:nvPr/>
+      </p:nvGrpSpPr>
+      <p:grpSpPr>
+        <a:xfrm>
+          <a:off x="0" y="0"/>
+          <a:ext cx="0" cy="0"/>
+          <a:chOff x="0" y="0"/>
+          <a:chExt cx="0" cy="0"/>
+        </a:xfrm>
+      </p:grpSpPr>
+      <p:sp>
+        <p:nvSpPr>
+          <p:cNvPr id="2" name="Text 0"/>
+          <p:cNvSpPr/>
+          <p:nvPr/>
+        </p:nvSpPr>
+        <p:spPr>
+          <a:xfrm>
+            <a:off x="457200" y="201168"/>
+            <a:ext cx="8229600" cy="256032"/>
+          </a:xfrm>
+          <a:prstGeom prst="rect">
+            <a:avLst/>
+          </a:prstGeom>
+          <a:noFill/>
+          <a:ln/>
+        </p:spPr>
+        <p:txBody>
+          <a:bodyPr wrap="square" lIns="0" tIns="0" rIns="0" bIns="0" rtlCol="0" anchor="ctr"/>
+          <a:lstStyle/>
+          <a:p>
+            <a:pPr indent="0" marL="0">
+              <a:buNone/>
+            </a:pPr>
+            <a:r>
+              <a:rPr lang="en-US" sz="1100" b="1" spc="200" kern="0" dirty="0">
+                <a:solidFill>
+                  <a:srgbClr val="9C7A00"/>
+                </a:solidFill>
+                <a:latin typeface="Calibri" pitchFamily="34" charset="0"/>
+                <a:ea typeface="Calibri" pitchFamily="34" charset="-122"/>
+                <a:cs typeface="Calibri" pitchFamily="34" charset="-120"/>
+              </a:rPr>
+              <a:t>S9_P2 · BENCHMARKS MESURÉS SUR TA MACHINE</a:t>
+            </a:r>
+            <a:endParaRPr lang="en-US" sz="1100" dirty="0"/>
+          </a:p>
+        </p:txBody>
+      </p:sp>
+      <p:sp>
+        <p:nvSpPr>
+          <p:cNvPr id="3" name="Text 1"/>
+          <p:cNvSpPr/>
+          <p:nvPr/>
+        </p:nvSpPr>
+        <p:spPr>
+          <a:xfrm>
+            <a:off x="457200" y="438912"/>
+            <a:ext cx="8229600" cy="566928"/>
+          </a:xfrm>
+          <a:prstGeom prst="rect">
+            <a:avLst/>
+          </a:prstGeom>
+          <a:noFill/>
+          <a:ln/>
+        </p:spPr>
+        <p:txBody>
+          <a:bodyPr wrap="square" lIns="0" tIns="0" rIns="0" bIns="0" rtlCol="0" anchor="ctr"/>
+          <a:lstStyle/>
+          <a:p>
+            <a:pPr indent="0" marL="0">
+              <a:buNone/>
+            </a:pPr>
+            <a:r>
+              <a:rPr lang="en-US" sz="2700" b="1" dirty="0">
+                <a:solidFill>
+                  <a:srgbClr val="1E2761"/>
+                </a:solidFill>
+                <a:latin typeface="Calibri" pitchFamily="34" charset="0"/>
+                <a:ea typeface="Calibri" pitchFamily="34" charset="-122"/>
+                <a:cs typeface="Calibri" pitchFamily="34" charset="-120"/>
+              </a:rPr>
+              <a:t>Le GPU : quand il sert… et quand il RALENTIT</a:t>
+            </a:r>
+            <a:endParaRPr lang="en-US" sz="2700" dirty="0"/>
+          </a:p>
+        </p:txBody>
+      </p:sp>
+      <p:graphicFrame>
+        <p:nvGraphicFramePr>
+          <p:cNvPr id="4" name="Chart 0" descr=""/>
+          <p:cNvGraphicFramePr/>
+          <p:nvPr/>
+        </p:nvGraphicFramePr>
+        <p:xfrm>
+          <a:off x="457200" y="1188720"/>
+          <a:ext cx="4206240" cy="2560320"/>
+        </p:xfrm>
+        <a:graphic xmlns:a="http://schemas.openxmlformats.org/drawingml/2006/main">
+          <a:graphicData uri="http://schemas.openxmlformats.org/drawingml/2006/chart">
+            <c:chart xmlns:c="http://schemas.openxmlformats.org/drawingml/2006/chart" r:id="rId1"/>
+          </a:graphicData>
+        </a:graphic>
+      </p:graphicFrame>
+      <p:sp>
+        <p:nvSpPr>
+          <p:cNvPr id="5" name="Shape 2"/>
+          <p:cNvSpPr/>
+          <p:nvPr/>
+        </p:nvSpPr>
+        <p:spPr>
+          <a:xfrm>
+            <a:off x="457200" y="3886200"/>
+            <a:ext cx="4206240" cy="914400"/>
+          </a:xfrm>
+          <a:prstGeom prst="roundRect">
+            <a:avLst>
+              <a:gd name="adj" fmla="val 6000"/>
+            </a:avLst>
+          </a:prstGeom>
+          <a:solidFill>
+            <a:srgbClr val="FFF6DD"/>
+          </a:solidFill>
+          <a:ln/>
+          <a:effectLst>
+            <a:outerShdw sx="100000" sy="100000" kx="0" ky="0" algn="bl" rotWithShape="0" blurRad="88900" dist="25400" dir="2700000">
+              <a:srgbClr val="000000">
+                <a:alpha val="14000"/>
+              </a:srgbClr>
+            </a:outerShdw>
+          </a:effectLst>
+        </p:spPr>
+      </p:sp>
+      <p:sp>
+        <p:nvSpPr>
+          <p:cNvPr id="6" name="Text 3"/>
+          <p:cNvSpPr/>
+          <p:nvPr/>
+        </p:nvSpPr>
+        <p:spPr>
+          <a:xfrm>
+            <a:off x="603504" y="3995928"/>
+            <a:ext cx="3913632" cy="274320"/>
+          </a:xfrm>
+          <a:prstGeom prst="rect">
+            <a:avLst/>
+          </a:prstGeom>
+          <a:noFill/>
+          <a:ln/>
+        </p:spPr>
+        <p:txBody>
+          <a:bodyPr wrap="square" lIns="0" tIns="0" rIns="0" bIns="0" rtlCol="0" anchor="ctr"/>
+          <a:lstStyle/>
+          <a:p>
+            <a:pPr indent="0" marL="0">
+              <a:buNone/>
+            </a:pPr>
+            <a:r>
+              <a:rPr lang="en-US" sz="1250" b="1" dirty="0">
+                <a:solidFill>
+                  <a:srgbClr val="1E2761"/>
+                </a:solidFill>
+                <a:latin typeface="Calibri" pitchFamily="34" charset="0"/>
+                <a:ea typeface="Calibri" pitchFamily="34" charset="-122"/>
+                <a:cs typeface="Calibri" pitchFamily="34" charset="-120"/>
+              </a:rPr>
+              <a:t>🔴 Le GPU est 4 à 7× PLUS LENT ici</a:t>
+            </a:r>
+            <a:endParaRPr lang="en-US" sz="1250" dirty="0"/>
+          </a:p>
+        </p:txBody>
+      </p:sp>
+      <p:sp>
+        <p:nvSpPr>
+          <p:cNvPr id="7" name="Text 4"/>
+          <p:cNvSpPr/>
+          <p:nvPr/>
+        </p:nvSpPr>
+        <p:spPr>
+          <a:xfrm>
+            <a:off x="603504" y="4288536"/>
+            <a:ext cx="3913632" cy="402336"/>
+          </a:xfrm>
+          <a:prstGeom prst="rect">
+            <a:avLst/>
+          </a:prstGeom>
+          <a:noFill/>
+          <a:ln/>
+        </p:spPr>
+        <p:txBody>
+          <a:bodyPr wrap="square" lIns="0" tIns="0" rIns="0" bIns="0" rtlCol="0" anchor="t"/>
+          <a:lstStyle/>
+          <a:p>
+            <a:pPr indent="0" marL="0">
+              <a:lnSpc>
+                <a:spcPct val="106000"/>
+              </a:lnSpc>
+              <a:buNone/>
+            </a:pPr>
+            <a:r>
+              <a:rPr lang="en-US" sz="1000" dirty="0">
+                <a:solidFill>
+                  <a:srgbClr val="2A3550"/>
+                </a:solidFill>
+                <a:latin typeface="Calibri" pitchFamily="34" charset="0"/>
+                <a:ea typeface="Calibri" pitchFamily="34" charset="-122"/>
+                <a:cs typeface="Calibri" pitchFamily="34" charset="-120"/>
+              </a:rPr>
+              <a:t>Et ce n'est PAS un bug : envoyer les données vers la carte coûte plus cher que le calcul lui-même sur un modèle jouet.</a:t>
+            </a:r>
+            <a:endParaRPr lang="en-US" sz="1050" dirty="0"/>
+          </a:p>
+        </p:txBody>
+      </p:sp>
+      <p:sp>
+        <p:nvSpPr>
+          <p:cNvPr id="8" name="Shape 5"/>
+          <p:cNvSpPr/>
+          <p:nvPr/>
+        </p:nvSpPr>
+        <p:spPr>
+          <a:xfrm>
+            <a:off x="4846320" y="1188720"/>
+            <a:ext cx="3840480" cy="1600200"/>
+          </a:xfrm>
+          <a:prstGeom prst="roundRect">
+            <a:avLst>
+              <a:gd name="adj" fmla="val 3429"/>
+            </a:avLst>
+          </a:prstGeom>
+          <a:solidFill>
+            <a:srgbClr val="E9FAF5"/>
+          </a:solidFill>
+          <a:ln/>
+          <a:effectLst>
+            <a:outerShdw sx="100000" sy="100000" kx="0" ky="0" algn="bl" rotWithShape="0" blurRad="88900" dist="25400" dir="2700000">
+              <a:srgbClr val="000000">
+                <a:alpha val="14000"/>
+              </a:srgbClr>
+            </a:outerShdw>
+          </a:effectLst>
+        </p:spPr>
+      </p:sp>
+      <p:sp>
+        <p:nvSpPr>
+          <p:cNvPr id="9" name="Text 6"/>
+          <p:cNvSpPr/>
+          <p:nvPr/>
+        </p:nvSpPr>
+        <p:spPr>
+          <a:xfrm>
+            <a:off x="4992624" y="1298448"/>
+            <a:ext cx="3547872" cy="274320"/>
+          </a:xfrm>
+          <a:prstGeom prst="rect">
+            <a:avLst/>
+          </a:prstGeom>
+          <a:noFill/>
+          <a:ln/>
+        </p:spPr>
+        <p:txBody>
+          <a:bodyPr wrap="square" lIns="0" tIns="0" rIns="0" bIns="0" rtlCol="0" anchor="ctr"/>
+          <a:lstStyle/>
+          <a:p>
+            <a:pPr indent="0" marL="0">
+              <a:buNone/>
+            </a:pPr>
+            <a:r>
+              <a:rPr lang="en-US" sz="1250" b="1" dirty="0">
+                <a:solidFill>
+                  <a:srgbClr val="1E2761"/>
+                </a:solidFill>
+                <a:latin typeface="Calibri" pitchFamily="34" charset="0"/>
+                <a:ea typeface="Calibri" pitchFamily="34" charset="-122"/>
+                <a:cs typeface="Calibri" pitchFamily="34" charset="-120"/>
+              </a:rPr>
+              <a:t>Quand le GPU gagne vraiment</a:t>
+            </a:r>
+            <a:endParaRPr lang="en-US" sz="1250" dirty="0"/>
+          </a:p>
+        </p:txBody>
+      </p:sp>
+      <p:sp>
+        <p:nvSpPr>
+          <p:cNvPr id="10" name="Text 7"/>
+          <p:cNvSpPr/>
+          <p:nvPr/>
+        </p:nvSpPr>
+        <p:spPr>
+          <a:xfrm>
+            <a:off x="4992624" y="1591056"/>
+            <a:ext cx="3547872" cy="1088136"/>
+          </a:xfrm>
+          <a:prstGeom prst="rect">
+            <a:avLst/>
+          </a:prstGeom>
+          <a:noFill/>
+          <a:ln/>
+        </p:spPr>
+        <p:txBody>
+          <a:bodyPr wrap="square" lIns="0" tIns="0" rIns="0" bIns="0" rtlCol="0" anchor="t"/>
+          <a:lstStyle/>
+          <a:p>
+            <a:pPr indent="0" marL="0">
+              <a:lnSpc>
+                <a:spcPct val="106000"/>
+              </a:lnSpc>
+              <a:buNone/>
+            </a:pPr>
+            <a:r>
+              <a:rPr lang="en-US" sz="1050" dirty="0">
+                <a:solidFill>
+                  <a:srgbClr val="2A3550"/>
+                </a:solidFill>
+                <a:latin typeface="Calibri" pitchFamily="34" charset="0"/>
+                <a:ea typeface="Calibri" pitchFamily="34" charset="-122"/>
+                <a:cs typeface="Calibri" pitchFamily="34" charset="-120"/>
+              </a:rPr>
+              <a:t>Sur une multiplication de matrices 4096×4096 : ×3,6 plus rapide que le CPU.</a:t>
+            </a:r>
+            <a:endParaRPr lang="en-US" sz="1050" dirty="0"/>
+          </a:p>
+          <a:p>
+            <a:pPr indent="0" marL="0">
+              <a:lnSpc>
+                <a:spcPct val="106000"/>
+              </a:lnSpc>
+              <a:buNone/>
+            </a:pPr>
+            <a:r>
+              <a:rPr lang="en-US" sz="1050" dirty="0">
+                <a:solidFill>
+                  <a:srgbClr val="2A3550"/>
+                </a:solidFill>
+                <a:latin typeface="Calibri" pitchFamily="34" charset="0"/>
+                <a:ea typeface="Calibri" pitchFamily="34" charset="-122"/>
+                <a:cs typeface="Calibri" pitchFamily="34" charset="-120"/>
+              </a:rPr>
+              <a:t>→ Il gagne sur les CNN (images), les transformers, les batchs ≥ 32. Un poids lourd est inutile pour livrer une lettre.</a:t>
+            </a:r>
+            <a:endParaRPr lang="en-US" sz="1050" dirty="0"/>
+          </a:p>
+        </p:txBody>
+      </p:sp>
+      <p:sp>
+        <p:nvSpPr>
+          <p:cNvPr id="11" name="Shape 8"/>
+          <p:cNvSpPr/>
+          <p:nvPr/>
+        </p:nvSpPr>
+        <p:spPr>
+          <a:xfrm>
+            <a:off x="4846320" y="2926080"/>
+            <a:ext cx="3840480" cy="914400"/>
+          </a:xfrm>
+          <a:prstGeom prst="roundRect">
+            <a:avLst>
+              <a:gd name="adj" fmla="val 6000"/>
+            </a:avLst>
+          </a:prstGeom>
+          <a:solidFill>
+            <a:srgbClr val="EEF4FE"/>
+          </a:solidFill>
+          <a:ln/>
+          <a:effectLst>
+            <a:outerShdw sx="100000" sy="100000" kx="0" ky="0" algn="bl" rotWithShape="0" blurRad="88900" dist="25400" dir="2700000">
+              <a:srgbClr val="000000">
+                <a:alpha val="14000"/>
+              </a:srgbClr>
+            </a:outerShdw>
+          </a:effectLst>
+        </p:spPr>
+      </p:sp>
+      <p:sp>
+        <p:nvSpPr>
+          <p:cNvPr id="12" name="Text 9"/>
+          <p:cNvSpPr/>
+          <p:nvPr/>
+        </p:nvSpPr>
+        <p:spPr>
+          <a:xfrm>
+            <a:off x="4992624" y="3035808"/>
+            <a:ext cx="3547872" cy="274320"/>
+          </a:xfrm>
+          <a:prstGeom prst="rect">
+            <a:avLst/>
+          </a:prstGeom>
+          <a:noFill/>
+          <a:ln/>
+        </p:spPr>
+        <p:txBody>
+          <a:bodyPr wrap="square" lIns="0" tIns="0" rIns="0" bIns="0" rtlCol="0" anchor="ctr"/>
+          <a:lstStyle/>
+          <a:p>
+            <a:pPr indent="0" marL="0">
+              <a:buNone/>
+            </a:pPr>
+            <a:r>
+              <a:rPr lang="en-US" sz="1250" b="1" dirty="0">
+                <a:solidFill>
+                  <a:srgbClr val="1E2761"/>
+                </a:solidFill>
+                <a:latin typeface="Calibri" pitchFamily="34" charset="0"/>
+                <a:ea typeface="Calibri" pitchFamily="34" charset="-122"/>
+                <a:cs typeface="Calibri" pitchFamily="34" charset="-120"/>
+              </a:rPr>
+              <a:t>PyTorch sur AMD : l'API garde le nom « cuda »</a:t>
+            </a:r>
+            <a:endParaRPr lang="en-US" sz="1250" dirty="0"/>
+          </a:p>
+        </p:txBody>
+      </p:sp>
+      <p:sp>
+        <p:nvSpPr>
+          <p:cNvPr id="13" name="Text 10"/>
+          <p:cNvSpPr/>
+          <p:nvPr/>
+        </p:nvSpPr>
+        <p:spPr>
+          <a:xfrm>
+            <a:off x="4992624" y="3328416"/>
+            <a:ext cx="3547872" cy="402336"/>
+          </a:xfrm>
+          <a:prstGeom prst="rect">
+            <a:avLst/>
+          </a:prstGeom>
+          <a:noFill/>
+          <a:ln/>
+        </p:spPr>
+        <p:txBody>
+          <a:bodyPr wrap="square" lIns="0" tIns="0" rIns="0" bIns="0" rtlCol="0" anchor="t"/>
+          <a:lstStyle/>
+          <a:p>
+            <a:pPr indent="0" marL="0">
+              <a:lnSpc>
+                <a:spcPct val="106000"/>
+              </a:lnSpc>
+              <a:buNone/>
+            </a:pPr>
+            <a:r>
+              <a:rPr lang="en-US" sz="950" dirty="0">
+                <a:solidFill>
+                  <a:srgbClr val="2A3550"/>
+                </a:solidFill>
+                <a:latin typeface="Calibri" pitchFamily="34" charset="0"/>
+                <a:ea typeface="Calibri" pitchFamily="34" charset="-122"/>
+                <a:cs typeface="Calibri" pitchFamily="34" charset="-120"/>
+              </a:rPr>
+              <a:t>torch 2.9.1+rocm — ROCm imite l'API NVIDIA, donc ton code reste identique à un tuto CUDA.</a:t>
+            </a:r>
+            <a:endParaRPr lang="en-US" sz="1050" dirty="0"/>
+          </a:p>
+        </p:txBody>
+      </p:sp>
+      <p:sp>
+        <p:nvSpPr>
+          <p:cNvPr id="14" name="Shape 11"/>
+          <p:cNvSpPr/>
+          <p:nvPr/>
+        </p:nvSpPr>
+        <p:spPr>
+          <a:xfrm>
+            <a:off x="4846320" y="3977640"/>
+            <a:ext cx="3840480" cy="822960"/>
+          </a:xfrm>
+          <a:prstGeom prst="roundRect">
+            <a:avLst>
+              <a:gd name="adj" fmla="val 6667"/>
+            </a:avLst>
+          </a:prstGeom>
+          <a:solidFill>
+            <a:srgbClr val="EEF4FE"/>
+          </a:solidFill>
+          <a:ln/>
+          <a:effectLst>
+            <a:outerShdw sx="100000" sy="100000" kx="0" ky="0" algn="bl" rotWithShape="0" blurRad="88900" dist="25400" dir="2700000">
+              <a:srgbClr val="000000">
+                <a:alpha val="14000"/>
+              </a:srgbClr>
+            </a:outerShdw>
+          </a:effectLst>
+        </p:spPr>
+      </p:sp>
+      <p:sp>
+        <p:nvSpPr>
+          <p:cNvPr id="15" name="Text 12"/>
+          <p:cNvSpPr/>
+          <p:nvPr/>
+        </p:nvSpPr>
+        <p:spPr>
+          <a:xfrm>
+            <a:off x="4992624" y="4087368"/>
+            <a:ext cx="3547872" cy="274320"/>
+          </a:xfrm>
+          <a:prstGeom prst="rect">
+            <a:avLst/>
+          </a:prstGeom>
+          <a:noFill/>
+          <a:ln/>
+        </p:spPr>
+        <p:txBody>
+          <a:bodyPr wrap="square" lIns="0" tIns="0" rIns="0" bIns="0" rtlCol="0" anchor="ctr"/>
+          <a:lstStyle/>
+          <a:p>
+            <a:pPr indent="0" marL="0">
+              <a:buNone/>
+            </a:pPr>
+            <a:r>
+              <a:rPr lang="en-US" sz="1250" b="1" dirty="0">
+                <a:solidFill>
+                  <a:srgbClr val="1E2761"/>
+                </a:solidFill>
+                <a:latin typeface="Calibri" pitchFamily="34" charset="0"/>
+                <a:ea typeface="Calibri" pitchFamily="34" charset="-122"/>
+                <a:cs typeface="Calibri" pitchFamily="34" charset="-120"/>
+              </a:rPr>
+              <a:t>⭐ La règle à retenir</a:t>
+            </a:r>
+            <a:endParaRPr lang="en-US" sz="1250" dirty="0"/>
+          </a:p>
+        </p:txBody>
+      </p:sp>
+      <p:sp>
+        <p:nvSpPr>
+          <p:cNvPr id="16" name="Text 13"/>
+          <p:cNvSpPr/>
+          <p:nvPr/>
+        </p:nvSpPr>
+        <p:spPr>
+          <a:xfrm>
+            <a:off x="4992624" y="4379976"/>
+            <a:ext cx="3547872" cy="310896"/>
+          </a:xfrm>
+          <a:prstGeom prst="rect">
+            <a:avLst/>
+          </a:prstGeom>
+          <a:noFill/>
+          <a:ln/>
+        </p:spPr>
+        <p:txBody>
+          <a:bodyPr wrap="square" lIns="0" tIns="0" rIns="0" bIns="0" rtlCol="0" anchor="t"/>
+          <a:lstStyle/>
+          <a:p>
+            <a:pPr indent="0" marL="0">
+              <a:lnSpc>
+                <a:spcPct val="106000"/>
+              </a:lnSpc>
+              <a:buNone/>
+            </a:pPr>
+            <a:r>
+              <a:rPr lang="en-US" sz="950" b="1" dirty="0">
+                <a:solidFill>
+                  <a:srgbClr val="2A3550"/>
+                </a:solidFill>
+                <a:latin typeface="Calibri" pitchFamily="34" charset="0"/>
+                <a:ea typeface="Calibri" pitchFamily="34" charset="-122"/>
+                <a:cs typeface="Calibri" pitchFamily="34" charset="-120"/>
+              </a:rPr>
+              <a:t>.to(device) est un RÉFLEXE pour la suite, pas une optimisation pour aujourd'hui. Un modèle jouet reste sur CPU.</a:t>
+            </a:r>
+            <a:endParaRPr lang="en-US" sz="1050" dirty="0"/>
+          </a:p>
+        </p:txBody>
+      </p:sp>
+    </p:spTree>
+  </p:cSld>
+  <p:clrMapOvr>
+    <a:masterClrMapping/>
+  </p:clrMapOvr>
+</p:sld>
+</file>
+
+<file path=ppt/slides/slide46.xml><?xml version="1.0" encoding="utf-8"?>
+<p:sld xmlns:a="http://schemas.openxmlformats.org/drawingml/2006/main" xmlns:r="http://schemas.openxmlformats.org/officeDocument/2006/relationships" xmlns:p="http://schemas.openxmlformats.org/presentationml/2006/main">
+  <p:cSld name="Slide 46">
+    <p:bg>
+      <p:bgPr>
+        <a:solidFill>
+          <a:srgbClr val="FFFFFF"/>
+        </a:solidFill>
+      </p:bgPr>
+    </p:bg>
+    <p:spTree>
+      <p:nvGrpSpPr>
+        <p:cNvPr id="1" name=""/>
+        <p:cNvGrpSpPr/>
+        <p:nvPr/>
+      </p:nvGrpSpPr>
+      <p:grpSpPr>
+        <a:xfrm>
+          <a:off x="0" y="0"/>
+          <a:ext cx="0" cy="0"/>
+          <a:chOff x="0" y="0"/>
+          <a:chExt cx="0" cy="0"/>
+        </a:xfrm>
+      </p:grpSpPr>
+      <p:sp>
+        <p:nvSpPr>
+          <p:cNvPr id="2" name="Text 0"/>
+          <p:cNvSpPr/>
+          <p:nvPr/>
+        </p:nvSpPr>
+        <p:spPr>
+          <a:xfrm>
+            <a:off x="457200" y="201168"/>
+            <a:ext cx="8229600" cy="256032"/>
+          </a:xfrm>
+          <a:prstGeom prst="rect">
+            <a:avLst/>
+          </a:prstGeom>
+          <a:noFill/>
+          <a:ln/>
+        </p:spPr>
+        <p:txBody>
+          <a:bodyPr wrap="square" lIns="0" tIns="0" rIns="0" bIns="0" rtlCol="0" anchor="ctr"/>
+          <a:lstStyle/>
+          <a:p>
+            <a:pPr indent="0" marL="0">
+              <a:buNone/>
+            </a:pPr>
+            <a:r>
+              <a:rPr lang="en-US" sz="1100" b="1" spc="200" kern="0" dirty="0">
+                <a:solidFill>
+                  <a:srgbClr val="017A61"/>
+                </a:solidFill>
+                <a:latin typeface="Calibri" pitchFamily="34" charset="0"/>
+                <a:ea typeface="Calibri" pitchFamily="34" charset="-122"/>
+                <a:cs typeface="Calibri" pitchFamily="34" charset="-120"/>
+              </a:rPr>
+              <a:t>LE MUR DE LA HONTE (ON A TOUS FAIT CES ERREURS)</a:t>
+            </a:r>
+            <a:endParaRPr lang="en-US" sz="1100" dirty="0"/>
+          </a:p>
+        </p:txBody>
+      </p:sp>
+      <p:sp>
+        <p:nvSpPr>
+          <p:cNvPr id="3" name="Text 1"/>
+          <p:cNvSpPr/>
+          <p:nvPr/>
+        </p:nvSpPr>
+        <p:spPr>
+          <a:xfrm>
+            <a:off x="457200" y="438912"/>
+            <a:ext cx="8229600" cy="566928"/>
+          </a:xfrm>
+          <a:prstGeom prst="rect">
+            <a:avLst/>
+          </a:prstGeom>
+          <a:noFill/>
+          <a:ln/>
+        </p:spPr>
+        <p:txBody>
+          <a:bodyPr wrap="square" lIns="0" tIns="0" rIns="0" bIns="0" rtlCol="0" anchor="ctr"/>
+          <a:lstStyle/>
+          <a:p>
+            <a:pPr indent="0" marL="0">
+              <a:buNone/>
+            </a:pPr>
+            <a:r>
+              <a:rPr lang="en-US" sz="2700" b="1" dirty="0">
+                <a:solidFill>
+                  <a:srgbClr val="1E2761"/>
+                </a:solidFill>
+                <a:latin typeface="Calibri" pitchFamily="34" charset="0"/>
+                <a:ea typeface="Calibri" pitchFamily="34" charset="-122"/>
+                <a:cs typeface="Calibri" pitchFamily="34" charset="-120"/>
+              </a:rPr>
+              <a:t>Les 8 pièges célèbres du cours 🏆</a:t>
+            </a:r>
+            <a:endParaRPr lang="en-US" sz="2700" dirty="0"/>
+          </a:p>
+        </p:txBody>
+      </p:sp>
+      <p:sp>
+        <p:nvSpPr>
+          <p:cNvPr id="4" name="Shape 2"/>
+          <p:cNvSpPr/>
+          <p:nvPr/>
+        </p:nvSpPr>
+        <p:spPr>
+          <a:xfrm>
+            <a:off x="457200" y="1188720"/>
+            <a:ext cx="4041648" cy="804672"/>
+          </a:xfrm>
+          <a:prstGeom prst="roundRect">
+            <a:avLst>
+              <a:gd name="adj" fmla="val 6818"/>
+            </a:avLst>
+          </a:prstGeom>
+          <a:solidFill>
+            <a:srgbClr val="EEF4FE"/>
+          </a:solidFill>
+          <a:ln/>
+          <a:effectLst>
+            <a:outerShdw sx="100000" sy="100000" kx="0" ky="0" algn="bl" rotWithShape="0" blurRad="88900" dist="25400" dir="2700000">
+              <a:srgbClr val="000000">
+                <a:alpha val="14000"/>
+              </a:srgbClr>
+            </a:outerShdw>
+          </a:effectLst>
+        </p:spPr>
+      </p:sp>
+      <p:sp>
+        <p:nvSpPr>
+          <p:cNvPr id="5" name="Shape 3"/>
+          <p:cNvSpPr/>
+          <p:nvPr/>
+        </p:nvSpPr>
+        <p:spPr>
+          <a:xfrm>
+            <a:off x="566928" y="1426464"/>
+            <a:ext cx="329184" cy="329184"/>
+          </a:xfrm>
+          <a:prstGeom prst="ellipse">
+            <a:avLst/>
+          </a:prstGeom>
+          <a:solidFill>
+            <a:srgbClr val="D64550"/>
+          </a:solidFill>
+          <a:ln/>
+        </p:spPr>
+      </p:sp>
+      <p:sp>
+        <p:nvSpPr>
+          <p:cNvPr id="6" name="Text 4"/>
+          <p:cNvSpPr/>
+          <p:nvPr/>
+        </p:nvSpPr>
+        <p:spPr>
+          <a:xfrm>
+            <a:off x="566928" y="1417320"/>
+            <a:ext cx="329184" cy="329184"/>
+          </a:xfrm>
+          <a:prstGeom prst="rect">
+            <a:avLst/>
+          </a:prstGeom>
+          <a:noFill/>
+          <a:ln/>
+        </p:spPr>
+        <p:txBody>
+          <a:bodyPr wrap="square" lIns="0" tIns="0" rIns="0" bIns="0" rtlCol="0" anchor="ctr"/>
+          <a:lstStyle/>
+          <a:p>
+            <a:pPr algn="ctr" indent="0" marL="0">
+              <a:buNone/>
+            </a:pPr>
+            <a:r>
+              <a:rPr lang="en-US" sz="1300" b="1" dirty="0">
+                <a:solidFill>
+                  <a:srgbClr val="FFFFFF"/>
+                </a:solidFill>
+                <a:latin typeface="Calibri" pitchFamily="34" charset="0"/>
+                <a:ea typeface="Calibri" pitchFamily="34" charset="-122"/>
+                <a:cs typeface="Calibri" pitchFamily="34" charset="-120"/>
+              </a:rPr>
+              <a:t>1</a:t>
+            </a:r>
+            <a:endParaRPr lang="en-US" sz="1300" dirty="0"/>
+          </a:p>
+        </p:txBody>
+      </p:sp>
+      <p:sp>
+        <p:nvSpPr>
+          <p:cNvPr id="7" name="Text 5"/>
+          <p:cNvSpPr/>
+          <p:nvPr/>
+        </p:nvSpPr>
+        <p:spPr>
+          <a:xfrm>
+            <a:off x="1005840" y="1261872"/>
+            <a:ext cx="3401568" cy="685800"/>
+          </a:xfrm>
+          <a:prstGeom prst="rect">
+            <a:avLst/>
+          </a:prstGeom>
+          <a:noFill/>
+          <a:ln/>
+        </p:spPr>
+        <p:txBody>
+          <a:bodyPr wrap="square" lIns="0" tIns="0" rIns="0" bIns="0" rtlCol="0" anchor="t"/>
+          <a:lstStyle/>
+          <a:p>
+            <a:pPr indent="0" marL="0">
+              <a:lnSpc>
+                <a:spcPct val="105000"/>
+              </a:lnSpc>
+              <a:buNone/>
+            </a:pPr>
+            <a:r>
+              <a:rPr lang="en-US" sz="950" b="1" dirty="0">
+                <a:solidFill>
+                  <a:srgbClr val="1E2761"/>
+                </a:solidFill>
+                <a:latin typeface="Courier New" pitchFamily="34" charset="0"/>
+                <a:ea typeface="Courier New" pitchFamily="34" charset="-122"/>
+                <a:cs typeface="Courier New" pitchFamily="34" charset="-120"/>
+              </a:rPr>
+              <a:t>fit(X_test, y_test)</a:t>
+            </a:r>
+            <a:endParaRPr lang="en-US" sz="950" dirty="0"/>
+          </a:p>
+          <a:p>
+            <a:pPr indent="0" marL="0">
+              <a:lnSpc>
+                <a:spcPct val="105000"/>
+              </a:lnSpc>
+              <a:buNone/>
+            </a:pPr>
+            <a:r>
+              <a:rPr lang="en-US" sz="900" dirty="0">
+                <a:solidFill>
+                  <a:srgbClr val="2A3550"/>
+                </a:solidFill>
+                <a:latin typeface="Calibri" pitchFamily="34" charset="0"/>
+                <a:ea typeface="Calibri" pitchFamily="34" charset="-122"/>
+                <a:cs typeface="Calibri" pitchFamily="34" charset="-120"/>
+              </a:rPr>
+              <a:t>entraîné sur le test = l'élève avec les corrigés (S2_P3)</a:t>
+            </a:r>
+            <a:endParaRPr lang="en-US" sz="950" dirty="0"/>
+          </a:p>
+        </p:txBody>
+      </p:sp>
+      <p:sp>
+        <p:nvSpPr>
+          <p:cNvPr id="8" name="Shape 6"/>
+          <p:cNvSpPr/>
+          <p:nvPr/>
+        </p:nvSpPr>
+        <p:spPr>
+          <a:xfrm>
+            <a:off x="4681728" y="1188720"/>
+            <a:ext cx="4041648" cy="804672"/>
+          </a:xfrm>
+          <a:prstGeom prst="roundRect">
+            <a:avLst>
+              <a:gd name="adj" fmla="val 6818"/>
+            </a:avLst>
+          </a:prstGeom>
+          <a:solidFill>
+            <a:srgbClr val="EEF4FE"/>
+          </a:solidFill>
+          <a:ln/>
+          <a:effectLst>
+            <a:outerShdw sx="100000" sy="100000" kx="0" ky="0" algn="bl" rotWithShape="0" blurRad="88900" dist="25400" dir="2700000">
+              <a:srgbClr val="000000">
+                <a:alpha val="14000"/>
+              </a:srgbClr>
+            </a:outerShdw>
+          </a:effectLst>
+        </p:spPr>
+      </p:sp>
+      <p:sp>
+        <p:nvSpPr>
+          <p:cNvPr id="9" name="Shape 7"/>
+          <p:cNvSpPr/>
+          <p:nvPr/>
+        </p:nvSpPr>
+        <p:spPr>
+          <a:xfrm>
+            <a:off x="4791456" y="1426464"/>
+            <a:ext cx="329184" cy="329184"/>
+          </a:xfrm>
+          <a:prstGeom prst="ellipse">
+            <a:avLst/>
+          </a:prstGeom>
+          <a:solidFill>
+            <a:srgbClr val="D64550"/>
+          </a:solidFill>
+          <a:ln/>
+        </p:spPr>
+      </p:sp>
+      <p:sp>
+        <p:nvSpPr>
+          <p:cNvPr id="10" name="Text 8"/>
+          <p:cNvSpPr/>
+          <p:nvPr/>
+        </p:nvSpPr>
+        <p:spPr>
+          <a:xfrm>
+            <a:off x="4791456" y="1417320"/>
+            <a:ext cx="329184" cy="329184"/>
+          </a:xfrm>
+          <a:prstGeom prst="rect">
+            <a:avLst/>
+          </a:prstGeom>
+          <a:noFill/>
+          <a:ln/>
+        </p:spPr>
+        <p:txBody>
+          <a:bodyPr wrap="square" lIns="0" tIns="0" rIns="0" bIns="0" rtlCol="0" anchor="ctr"/>
+          <a:lstStyle/>
+          <a:p>
+            <a:pPr algn="ctr" indent="0" marL="0">
+              <a:buNone/>
+            </a:pPr>
+            <a:r>
+              <a:rPr lang="en-US" sz="1300" b="1" dirty="0">
+                <a:solidFill>
+                  <a:srgbClr val="FFFFFF"/>
+                </a:solidFill>
+                <a:latin typeface="Calibri" pitchFamily="34" charset="0"/>
+                <a:ea typeface="Calibri" pitchFamily="34" charset="-122"/>
+                <a:cs typeface="Calibri" pitchFamily="34" charset="-120"/>
+              </a:rPr>
+              <a:t>2</a:t>
+            </a:r>
+            <a:endParaRPr lang="en-US" sz="1300" dirty="0"/>
+          </a:p>
+        </p:txBody>
+      </p:sp>
+      <p:sp>
+        <p:nvSpPr>
+          <p:cNvPr id="11" name="Text 9"/>
+          <p:cNvSpPr/>
+          <p:nvPr/>
+        </p:nvSpPr>
+        <p:spPr>
+          <a:xfrm>
+            <a:off x="5230368" y="1261872"/>
+            <a:ext cx="3401568" cy="685800"/>
+          </a:xfrm>
+          <a:prstGeom prst="rect">
+            <a:avLst/>
+          </a:prstGeom>
+          <a:noFill/>
+          <a:ln/>
+        </p:spPr>
+        <p:txBody>
+          <a:bodyPr wrap="square" lIns="0" tIns="0" rIns="0" bIns="0" rtlCol="0" anchor="t"/>
+          <a:lstStyle/>
+          <a:p>
+            <a:pPr indent="0" marL="0">
+              <a:lnSpc>
+                <a:spcPct val="105000"/>
+              </a:lnSpc>
+              <a:buNone/>
+            </a:pPr>
+            <a:r>
+              <a:rPr lang="en-US" sz="950" b="1" dirty="0">
+                <a:solidFill>
+                  <a:srgbClr val="1E2761"/>
+                </a:solidFill>
+                <a:latin typeface="Courier New" pitchFamily="34" charset="0"/>
+                <a:ea typeface="Courier New" pitchFamily="34" charset="-122"/>
+                <a:cs typeface="Courier New" pitchFamily="34" charset="-120"/>
+              </a:rPr>
+              <a:t>classification_report(y_pred, y_test)</a:t>
+            </a:r>
+            <a:endParaRPr lang="en-US" sz="950" dirty="0"/>
+          </a:p>
+          <a:p>
+            <a:pPr indent="0" marL="0">
+              <a:lnSpc>
+                <a:spcPct val="105000"/>
+              </a:lnSpc>
+              <a:buNone/>
+            </a:pPr>
+            <a:r>
+              <a:rPr lang="en-US" sz="900" dirty="0">
+                <a:solidFill>
+                  <a:srgbClr val="2A3550"/>
+                </a:solidFill>
+                <a:latin typeface="Calibri" pitchFamily="34" charset="0"/>
+                <a:ea typeface="Calibri" pitchFamily="34" charset="-122"/>
+                <a:cs typeface="Calibri" pitchFamily="34" charset="-120"/>
+              </a:rPr>
+              <a:t>ordre inversé → précision et rappel ÉCHANGÉS (S3)</a:t>
+            </a:r>
+            <a:endParaRPr lang="en-US" sz="950" dirty="0"/>
+          </a:p>
+        </p:txBody>
+      </p:sp>
+      <p:sp>
+        <p:nvSpPr>
+          <p:cNvPr id="12" name="Shape 10"/>
+          <p:cNvSpPr/>
+          <p:nvPr/>
+        </p:nvSpPr>
+        <p:spPr>
+          <a:xfrm>
+            <a:off x="457200" y="2103120"/>
+            <a:ext cx="4041648" cy="804672"/>
+          </a:xfrm>
+          <a:prstGeom prst="roundRect">
+            <a:avLst>
+              <a:gd name="adj" fmla="val 6818"/>
+            </a:avLst>
+          </a:prstGeom>
+          <a:solidFill>
+            <a:srgbClr val="EEF4FE"/>
+          </a:solidFill>
+          <a:ln/>
+          <a:effectLst>
+            <a:outerShdw sx="100000" sy="100000" kx="0" ky="0" algn="bl" rotWithShape="0" blurRad="88900" dist="25400" dir="2700000">
+              <a:srgbClr val="000000">
+                <a:alpha val="14000"/>
+              </a:srgbClr>
+            </a:outerShdw>
+          </a:effectLst>
+        </p:spPr>
+      </p:sp>
+      <p:sp>
+        <p:nvSpPr>
+          <p:cNvPr id="13" name="Shape 11"/>
+          <p:cNvSpPr/>
+          <p:nvPr/>
+        </p:nvSpPr>
+        <p:spPr>
+          <a:xfrm>
+            <a:off x="566928" y="2340864"/>
+            <a:ext cx="329184" cy="329184"/>
+          </a:xfrm>
+          <a:prstGeom prst="ellipse">
+            <a:avLst/>
+          </a:prstGeom>
+          <a:solidFill>
+            <a:srgbClr val="D64550"/>
+          </a:solidFill>
+          <a:ln/>
+        </p:spPr>
+      </p:sp>
+      <p:sp>
+        <p:nvSpPr>
+          <p:cNvPr id="14" name="Text 12"/>
+          <p:cNvSpPr/>
+          <p:nvPr/>
+        </p:nvSpPr>
+        <p:spPr>
+          <a:xfrm>
+            <a:off x="566928" y="2331720"/>
+            <a:ext cx="329184" cy="329184"/>
+          </a:xfrm>
+          <a:prstGeom prst="rect">
+            <a:avLst/>
+          </a:prstGeom>
+          <a:noFill/>
+          <a:ln/>
+        </p:spPr>
+        <p:txBody>
+          <a:bodyPr wrap="square" lIns="0" tIns="0" rIns="0" bIns="0" rtlCol="0" anchor="ctr"/>
+          <a:lstStyle/>
+          <a:p>
+            <a:pPr algn="ctr" indent="0" marL="0">
+              <a:buNone/>
+            </a:pPr>
+            <a:r>
+              <a:rPr lang="en-US" sz="1300" b="1" dirty="0">
+                <a:solidFill>
+                  <a:srgbClr val="FFFFFF"/>
+                </a:solidFill>
+                <a:latin typeface="Calibri" pitchFamily="34" charset="0"/>
+                <a:ea typeface="Calibri" pitchFamily="34" charset="-122"/>
+                <a:cs typeface="Calibri" pitchFamily="34" charset="-120"/>
+              </a:rPr>
+              <a:t>3</a:t>
+            </a:r>
+            <a:endParaRPr lang="en-US" sz="1300" dirty="0"/>
+          </a:p>
+        </p:txBody>
+      </p:sp>
+      <p:sp>
+        <p:nvSpPr>
+          <p:cNvPr id="15" name="Text 13"/>
+          <p:cNvSpPr/>
+          <p:nvPr/>
+        </p:nvSpPr>
+        <p:spPr>
+          <a:xfrm>
+            <a:off x="1005840" y="2176272"/>
+            <a:ext cx="3401568" cy="685800"/>
+          </a:xfrm>
+          <a:prstGeom prst="rect">
+            <a:avLst/>
+          </a:prstGeom>
+          <a:noFill/>
+          <a:ln/>
+        </p:spPr>
+        <p:txBody>
+          <a:bodyPr wrap="square" lIns="0" tIns="0" rIns="0" bIns="0" rtlCol="0" anchor="t"/>
+          <a:lstStyle/>
+          <a:p>
+            <a:pPr indent="0" marL="0">
+              <a:lnSpc>
+                <a:spcPct val="105000"/>
+              </a:lnSpc>
+              <a:buNone/>
+            </a:pPr>
+            <a:r>
+              <a:rPr lang="en-US" sz="950" b="1" dirty="0">
+                <a:solidFill>
+                  <a:srgbClr val="1E2761"/>
+                </a:solidFill>
+                <a:latin typeface="Courier New" pitchFamily="34" charset="0"/>
+                <a:ea typeface="Courier New" pitchFamily="34" charset="-122"/>
+                <a:cs typeface="Courier New" pitchFamily="34" charset="-120"/>
+              </a:rPr>
+              <a:t>Le kernel qui « sauve »</a:t>
+            </a:r>
+            <a:endParaRPr lang="en-US" sz="950" dirty="0"/>
+          </a:p>
+          <a:p>
+            <a:pPr indent="0" marL="0">
+              <a:lnSpc>
+                <a:spcPct val="105000"/>
+              </a:lnSpc>
+              <a:buNone/>
+            </a:pPr>
+            <a:r>
+              <a:rPr lang="en-US" sz="900" dirty="0">
+                <a:solidFill>
+                  <a:srgbClr val="2A3550"/>
+                </a:solidFill>
+                <a:latin typeface="Calibri" pitchFamily="34" charset="0"/>
+                <a:ea typeface="Calibri" pitchFamily="34" charset="-122"/>
+                <a:cs typeface="Calibri" pitchFamily="34" charset="-120"/>
+              </a:rPr>
+              <a:t>imports supprimés mais encore en mémoire → Restart &amp; Run All ! (S3_P4)</a:t>
+            </a:r>
+            <a:endParaRPr lang="en-US" sz="950" dirty="0"/>
+          </a:p>
+        </p:txBody>
+      </p:sp>
+      <p:sp>
+        <p:nvSpPr>
+          <p:cNvPr id="16" name="Shape 14"/>
+          <p:cNvSpPr/>
+          <p:nvPr/>
+        </p:nvSpPr>
+        <p:spPr>
+          <a:xfrm>
+            <a:off x="4681728" y="2103120"/>
+            <a:ext cx="4041648" cy="804672"/>
+          </a:xfrm>
+          <a:prstGeom prst="roundRect">
+            <a:avLst>
+              <a:gd name="adj" fmla="val 6818"/>
+            </a:avLst>
+          </a:prstGeom>
+          <a:solidFill>
+            <a:srgbClr val="EEF4FE"/>
+          </a:solidFill>
+          <a:ln/>
+          <a:effectLst>
+            <a:outerShdw sx="100000" sy="100000" kx="0" ky="0" algn="bl" rotWithShape="0" blurRad="88900" dist="25400" dir="2700000">
+              <a:srgbClr val="000000">
+                <a:alpha val="14000"/>
+              </a:srgbClr>
+            </a:outerShdw>
+          </a:effectLst>
+        </p:spPr>
+      </p:sp>
+      <p:sp>
+        <p:nvSpPr>
+          <p:cNvPr id="17" name="Shape 15"/>
+          <p:cNvSpPr/>
+          <p:nvPr/>
+        </p:nvSpPr>
+        <p:spPr>
+          <a:xfrm>
+            <a:off x="4791456" y="2340864"/>
+            <a:ext cx="329184" cy="329184"/>
+          </a:xfrm>
+          <a:prstGeom prst="ellipse">
+            <a:avLst/>
+          </a:prstGeom>
+          <a:solidFill>
+            <a:srgbClr val="D64550"/>
+          </a:solidFill>
+          <a:ln/>
+        </p:spPr>
+      </p:sp>
+      <p:sp>
+        <p:nvSpPr>
+          <p:cNvPr id="18" name="Text 16"/>
+          <p:cNvSpPr/>
+          <p:nvPr/>
+        </p:nvSpPr>
+        <p:spPr>
+          <a:xfrm>
+            <a:off x="4791456" y="2331720"/>
+            <a:ext cx="329184" cy="329184"/>
+          </a:xfrm>
+          <a:prstGeom prst="rect">
+            <a:avLst/>
+          </a:prstGeom>
+          <a:noFill/>
+          <a:ln/>
+        </p:spPr>
+        <p:txBody>
+          <a:bodyPr wrap="square" lIns="0" tIns="0" rIns="0" bIns="0" rtlCol="0" anchor="ctr"/>
+          <a:lstStyle/>
+          <a:p>
+            <a:pPr algn="ctr" indent="0" marL="0">
+              <a:buNone/>
+            </a:pPr>
+            <a:r>
+              <a:rPr lang="en-US" sz="1300" b="1" dirty="0">
+                <a:solidFill>
+                  <a:srgbClr val="FFFFFF"/>
+                </a:solidFill>
+                <a:latin typeface="Calibri" pitchFamily="34" charset="0"/>
+                <a:ea typeface="Calibri" pitchFamily="34" charset="-122"/>
+                <a:cs typeface="Calibri" pitchFamily="34" charset="-120"/>
+              </a:rPr>
+              <a:t>4</a:t>
+            </a:r>
+            <a:endParaRPr lang="en-US" sz="1300" dirty="0"/>
+          </a:p>
+        </p:txBody>
+      </p:sp>
+      <p:sp>
+        <p:nvSpPr>
+          <p:cNvPr id="19" name="Text 17"/>
+          <p:cNvSpPr/>
+          <p:nvPr/>
+        </p:nvSpPr>
+        <p:spPr>
+          <a:xfrm>
+            <a:off x="5230368" y="2176272"/>
+            <a:ext cx="3401568" cy="685800"/>
+          </a:xfrm>
+          <a:prstGeom prst="rect">
+            <a:avLst/>
+          </a:prstGeom>
+          <a:noFill/>
+          <a:ln/>
+        </p:spPr>
+        <p:txBody>
+          <a:bodyPr wrap="square" lIns="0" tIns="0" rIns="0" bIns="0" rtlCol="0" anchor="t"/>
+          <a:lstStyle/>
+          <a:p>
+            <a:pPr indent="0" marL="0">
+              <a:lnSpc>
+                <a:spcPct val="105000"/>
+              </a:lnSpc>
+              <a:buNone/>
+            </a:pPr>
+            <a:r>
+              <a:rPr lang="en-US" sz="950" b="1" dirty="0">
+                <a:solidFill>
+                  <a:srgbClr val="1E2761"/>
+                </a:solidFill>
+                <a:latin typeface="Courier New" pitchFamily="34" charset="0"/>
+                <a:ea typeface="Courier New" pitchFamily="34" charset="-122"/>
+                <a:cs typeface="Courier New" pitchFamily="34" charset="-120"/>
+              </a:rPr>
+              <a:t>price / 1e6 exécuté 2 fois</a:t>
+            </a:r>
+            <a:endParaRPr lang="en-US" sz="950" dirty="0"/>
+          </a:p>
+          <a:p>
+            <a:pPr indent="0" marL="0">
+              <a:lnSpc>
+                <a:spcPct val="105000"/>
+              </a:lnSpc>
+              <a:buNone/>
+            </a:pPr>
+            <a:r>
+              <a:rPr lang="en-US" sz="900" dirty="0">
+                <a:solidFill>
+                  <a:srgbClr val="2A3550"/>
+                </a:solidFill>
+                <a:latin typeface="Calibri" pitchFamily="34" charset="0"/>
+                <a:ea typeface="Calibri" pitchFamily="34" charset="-122"/>
+                <a:cs typeface="Calibri" pitchFamily="34" charset="-120"/>
+              </a:rPr>
+              <a:t>cellule non-idempotente → tous les résultats faussés (S1_P2)</a:t>
+            </a:r>
+            <a:endParaRPr lang="en-US" sz="950" dirty="0"/>
+          </a:p>
+        </p:txBody>
+      </p:sp>
+      <p:sp>
+        <p:nvSpPr>
+          <p:cNvPr id="20" name="Shape 18"/>
+          <p:cNvSpPr/>
+          <p:nvPr/>
+        </p:nvSpPr>
+        <p:spPr>
+          <a:xfrm>
+            <a:off x="457200" y="3017520"/>
+            <a:ext cx="4041648" cy="804672"/>
+          </a:xfrm>
+          <a:prstGeom prst="roundRect">
+            <a:avLst>
+              <a:gd name="adj" fmla="val 6818"/>
+            </a:avLst>
+          </a:prstGeom>
+          <a:solidFill>
+            <a:srgbClr val="EEF4FE"/>
+          </a:solidFill>
+          <a:ln/>
+          <a:effectLst>
+            <a:outerShdw sx="100000" sy="100000" kx="0" ky="0" algn="bl" rotWithShape="0" blurRad="88900" dist="25400" dir="2700000">
+              <a:srgbClr val="000000">
+                <a:alpha val="14000"/>
+              </a:srgbClr>
+            </a:outerShdw>
+          </a:effectLst>
+        </p:spPr>
+      </p:sp>
+      <p:sp>
+        <p:nvSpPr>
+          <p:cNvPr id="21" name="Shape 19"/>
+          <p:cNvSpPr/>
+          <p:nvPr/>
+        </p:nvSpPr>
+        <p:spPr>
+          <a:xfrm>
+            <a:off x="566928" y="3255264"/>
+            <a:ext cx="329184" cy="329184"/>
+          </a:xfrm>
+          <a:prstGeom prst="ellipse">
+            <a:avLst/>
+          </a:prstGeom>
+          <a:solidFill>
+            <a:srgbClr val="D64550"/>
+          </a:solidFill>
+          <a:ln/>
+        </p:spPr>
+      </p:sp>
+      <p:sp>
+        <p:nvSpPr>
+          <p:cNvPr id="22" name="Text 20"/>
+          <p:cNvSpPr/>
+          <p:nvPr/>
+        </p:nvSpPr>
+        <p:spPr>
+          <a:xfrm>
+            <a:off x="566928" y="3246120"/>
+            <a:ext cx="329184" cy="329184"/>
+          </a:xfrm>
+          <a:prstGeom prst="rect">
+            <a:avLst/>
+          </a:prstGeom>
+          <a:noFill/>
+          <a:ln/>
+        </p:spPr>
+        <p:txBody>
+          <a:bodyPr wrap="square" lIns="0" tIns="0" rIns="0" bIns="0" rtlCol="0" anchor="ctr"/>
+          <a:lstStyle/>
+          <a:p>
+            <a:pPr algn="ctr" indent="0" marL="0">
+              <a:buNone/>
+            </a:pPr>
+            <a:r>
+              <a:rPr lang="en-US" sz="1300" b="1" dirty="0">
+                <a:solidFill>
+                  <a:srgbClr val="FFFFFF"/>
+                </a:solidFill>
+                <a:latin typeface="Calibri" pitchFamily="34" charset="0"/>
+                <a:ea typeface="Calibri" pitchFamily="34" charset="-122"/>
+                <a:cs typeface="Calibri" pitchFamily="34" charset="-120"/>
+              </a:rPr>
+              <a:t>5</a:t>
+            </a:r>
+            <a:endParaRPr lang="en-US" sz="1300" dirty="0"/>
+          </a:p>
+        </p:txBody>
+      </p:sp>
+      <p:sp>
+        <p:nvSpPr>
+          <p:cNvPr id="23" name="Text 21"/>
+          <p:cNvSpPr/>
+          <p:nvPr/>
+        </p:nvSpPr>
+        <p:spPr>
+          <a:xfrm>
+            <a:off x="1005840" y="3090672"/>
+            <a:ext cx="3401568" cy="685800"/>
+          </a:xfrm>
+          <a:prstGeom prst="rect">
+            <a:avLst/>
+          </a:prstGeom>
+          <a:noFill/>
+          <a:ln/>
+        </p:spPr>
+        <p:txBody>
+          <a:bodyPr wrap="square" lIns="0" tIns="0" rIns="0" bIns="0" rtlCol="0" anchor="t"/>
+          <a:lstStyle/>
+          <a:p>
+            <a:pPr indent="0" marL="0">
+              <a:lnSpc>
+                <a:spcPct val="105000"/>
+              </a:lnSpc>
+              <a:buNone/>
+            </a:pPr>
+            <a:r>
+              <a:rPr lang="en-US" sz="950" b="1" dirty="0">
+                <a:solidFill>
+                  <a:srgbClr val="1E2761"/>
+                </a:solidFill>
+                <a:latin typeface="Courier New" pitchFamily="34" charset="0"/>
+                <a:ea typeface="Courier New" pitchFamily="34" charset="-122"/>
+                <a:cs typeface="Courier New" pitchFamily="34" charset="-120"/>
+              </a:rPr>
+              <a:t>b = a  sur une liste</a:t>
+            </a:r>
+            <a:endParaRPr lang="en-US" sz="950" dirty="0"/>
+          </a:p>
+          <a:p>
+            <a:pPr indent="0" marL="0">
+              <a:lnSpc>
+                <a:spcPct val="105000"/>
+              </a:lnSpc>
+              <a:buNone/>
+            </a:pPr>
+            <a:r>
+              <a:rPr lang="en-US" sz="900" dirty="0">
+                <a:solidFill>
+                  <a:srgbClr val="2A3550"/>
+                </a:solidFill>
+                <a:latin typeface="Calibri" pitchFamily="34" charset="0"/>
+                <a:ea typeface="Calibri" pitchFamily="34" charset="-122"/>
+                <a:cs typeface="Calibri" pitchFamily="34" charset="-120"/>
+              </a:rPr>
+              <a:t>pas une copie ! .copy() sinon modifications partagées (day2)</a:t>
+            </a:r>
+            <a:endParaRPr lang="en-US" sz="950" dirty="0"/>
+          </a:p>
+        </p:txBody>
+      </p:sp>
+      <p:sp>
+        <p:nvSpPr>
+          <p:cNvPr id="24" name="Shape 22"/>
+          <p:cNvSpPr/>
+          <p:nvPr/>
+        </p:nvSpPr>
+        <p:spPr>
+          <a:xfrm>
+            <a:off x="4681728" y="3017520"/>
+            <a:ext cx="4041648" cy="804672"/>
+          </a:xfrm>
+          <a:prstGeom prst="roundRect">
+            <a:avLst>
+              <a:gd name="adj" fmla="val 6818"/>
+            </a:avLst>
+          </a:prstGeom>
+          <a:solidFill>
+            <a:srgbClr val="EEF4FE"/>
+          </a:solidFill>
+          <a:ln/>
+          <a:effectLst>
+            <a:outerShdw sx="100000" sy="100000" kx="0" ky="0" algn="bl" rotWithShape="0" blurRad="88900" dist="25400" dir="2700000">
+              <a:srgbClr val="000000">
+                <a:alpha val="14000"/>
+              </a:srgbClr>
+            </a:outerShdw>
+          </a:effectLst>
+        </p:spPr>
+      </p:sp>
+      <p:sp>
+        <p:nvSpPr>
+          <p:cNvPr id="25" name="Shape 23"/>
+          <p:cNvSpPr/>
+          <p:nvPr/>
+        </p:nvSpPr>
+        <p:spPr>
+          <a:xfrm>
+            <a:off x="4791456" y="3255264"/>
+            <a:ext cx="329184" cy="329184"/>
+          </a:xfrm>
+          <a:prstGeom prst="ellipse">
+            <a:avLst/>
+          </a:prstGeom>
+          <a:solidFill>
+            <a:srgbClr val="D64550"/>
+          </a:solidFill>
+          <a:ln/>
+        </p:spPr>
+      </p:sp>
+      <p:sp>
+        <p:nvSpPr>
+          <p:cNvPr id="26" name="Text 24"/>
+          <p:cNvSpPr/>
+          <p:nvPr/>
+        </p:nvSpPr>
+        <p:spPr>
+          <a:xfrm>
+            <a:off x="4791456" y="3246120"/>
+            <a:ext cx="329184" cy="329184"/>
+          </a:xfrm>
+          <a:prstGeom prst="rect">
+            <a:avLst/>
+          </a:prstGeom>
+          <a:noFill/>
+          <a:ln/>
+        </p:spPr>
+        <p:txBody>
+          <a:bodyPr wrap="square" lIns="0" tIns="0" rIns="0" bIns="0" rtlCol="0" anchor="ctr"/>
+          <a:lstStyle/>
+          <a:p>
+            <a:pPr algn="ctr" indent="0" marL="0">
+              <a:buNone/>
+            </a:pPr>
+            <a:r>
+              <a:rPr lang="en-US" sz="1300" b="1" dirty="0">
+                <a:solidFill>
+                  <a:srgbClr val="FFFFFF"/>
+                </a:solidFill>
+                <a:latin typeface="Calibri" pitchFamily="34" charset="0"/>
+                <a:ea typeface="Calibri" pitchFamily="34" charset="-122"/>
+                <a:cs typeface="Calibri" pitchFamily="34" charset="-120"/>
+              </a:rPr>
+              <a:t>6</a:t>
+            </a:r>
+            <a:endParaRPr lang="en-US" sz="1300" dirty="0"/>
+          </a:p>
+        </p:txBody>
+      </p:sp>
+      <p:sp>
+        <p:nvSpPr>
+          <p:cNvPr id="27" name="Text 25"/>
+          <p:cNvSpPr/>
+          <p:nvPr/>
+        </p:nvSpPr>
+        <p:spPr>
+          <a:xfrm>
+            <a:off x="5230368" y="3090672"/>
+            <a:ext cx="3401568" cy="685800"/>
+          </a:xfrm>
+          <a:prstGeom prst="rect">
+            <a:avLst/>
+          </a:prstGeom>
+          <a:noFill/>
+          <a:ln/>
+        </p:spPr>
+        <p:txBody>
+          <a:bodyPr wrap="square" lIns="0" tIns="0" rIns="0" bIns="0" rtlCol="0" anchor="t"/>
+          <a:lstStyle/>
+          <a:p>
+            <a:pPr indent="0" marL="0">
+              <a:lnSpc>
+                <a:spcPct val="105000"/>
+              </a:lnSpc>
+              <a:buNone/>
+            </a:pPr>
+            <a:r>
+              <a:rPr lang="en-US" sz="950" b="1" dirty="0">
+                <a:solidFill>
+                  <a:srgbClr val="1E2761"/>
+                </a:solidFill>
+                <a:latin typeface="Courier New" pitchFamily="34" charset="0"/>
+                <a:ea typeface="Courier New" pitchFamily="34" charset="-122"/>
+                <a:cs typeface="Courier New" pitchFamily="34" charset="-120"/>
+              </a:rPr>
+              <a:t>hypot(a**2 + b**2)</a:t>
+            </a:r>
+            <a:endParaRPr lang="en-US" sz="950" dirty="0"/>
+          </a:p>
+          <a:p>
+            <a:pPr indent="0" marL="0">
+              <a:lnSpc>
+                <a:spcPct val="105000"/>
+              </a:lnSpc>
+              <a:buNone/>
+            </a:pPr>
+            <a:r>
+              <a:rPr lang="en-US" sz="900" dirty="0">
+                <a:solidFill>
+                  <a:srgbClr val="2A3550"/>
+                </a:solidFill>
+                <a:latin typeface="Calibri" pitchFamily="34" charset="0"/>
+                <a:ea typeface="Calibri" pitchFamily="34" charset="-122"/>
+                <a:cs typeface="Calibri" pitchFamily="34" charset="-120"/>
+              </a:rPr>
+              <a:t>hypoténuse de 767 km — vérifier la SIGNATURE (fonction?) (day1)</a:t>
+            </a:r>
+            <a:endParaRPr lang="en-US" sz="950" dirty="0"/>
+          </a:p>
+        </p:txBody>
+      </p:sp>
+      <p:sp>
+        <p:nvSpPr>
+          <p:cNvPr id="28" name="Shape 26"/>
+          <p:cNvSpPr/>
+          <p:nvPr/>
+        </p:nvSpPr>
+        <p:spPr>
+          <a:xfrm>
+            <a:off x="457200" y="3931920"/>
+            <a:ext cx="4041648" cy="804672"/>
+          </a:xfrm>
+          <a:prstGeom prst="roundRect">
+            <a:avLst>
+              <a:gd name="adj" fmla="val 6818"/>
+            </a:avLst>
+          </a:prstGeom>
+          <a:solidFill>
+            <a:srgbClr val="EEF4FE"/>
+          </a:solidFill>
+          <a:ln/>
+          <a:effectLst>
+            <a:outerShdw sx="100000" sy="100000" kx="0" ky="0" algn="bl" rotWithShape="0" blurRad="88900" dist="25400" dir="2700000">
+              <a:srgbClr val="000000">
+                <a:alpha val="14000"/>
+              </a:srgbClr>
+            </a:outerShdw>
+          </a:effectLst>
+        </p:spPr>
+      </p:sp>
+      <p:sp>
+        <p:nvSpPr>
+          <p:cNvPr id="29" name="Shape 27"/>
+          <p:cNvSpPr/>
+          <p:nvPr/>
+        </p:nvSpPr>
+        <p:spPr>
+          <a:xfrm>
+            <a:off x="566928" y="4169664"/>
+            <a:ext cx="329184" cy="329184"/>
+          </a:xfrm>
+          <a:prstGeom prst="ellipse">
+            <a:avLst/>
+          </a:prstGeom>
+          <a:solidFill>
+            <a:srgbClr val="D64550"/>
+          </a:solidFill>
+          <a:ln/>
+        </p:spPr>
+      </p:sp>
+      <p:sp>
+        <p:nvSpPr>
+          <p:cNvPr id="30" name="Text 28"/>
+          <p:cNvSpPr/>
+          <p:nvPr/>
+        </p:nvSpPr>
+        <p:spPr>
+          <a:xfrm>
+            <a:off x="566928" y="4160520"/>
+            <a:ext cx="329184" cy="329184"/>
+          </a:xfrm>
+          <a:prstGeom prst="rect">
+            <a:avLst/>
+          </a:prstGeom>
+          <a:noFill/>
+          <a:ln/>
+        </p:spPr>
+        <p:txBody>
+          <a:bodyPr wrap="square" lIns="0" tIns="0" rIns="0" bIns="0" rtlCol="0" anchor="ctr"/>
+          <a:lstStyle/>
+          <a:p>
+            <a:pPr algn="ctr" indent="0" marL="0">
+              <a:buNone/>
+            </a:pPr>
+            <a:r>
+              <a:rPr lang="en-US" sz="1300" b="1" dirty="0">
+                <a:solidFill>
+                  <a:srgbClr val="FFFFFF"/>
+                </a:solidFill>
+                <a:latin typeface="Calibri" pitchFamily="34" charset="0"/>
+                <a:ea typeface="Calibri" pitchFamily="34" charset="-122"/>
+                <a:cs typeface="Calibri" pitchFamily="34" charset="-120"/>
+              </a:rPr>
+              <a:t>7</a:t>
+            </a:r>
+            <a:endParaRPr lang="en-US" sz="1300" dirty="0"/>
+          </a:p>
+        </p:txBody>
+      </p:sp>
+      <p:sp>
+        <p:nvSpPr>
+          <p:cNvPr id="31" name="Text 29"/>
+          <p:cNvSpPr/>
+          <p:nvPr/>
+        </p:nvSpPr>
+        <p:spPr>
+          <a:xfrm>
+            <a:off x="1005840" y="4005072"/>
+            <a:ext cx="3401568" cy="685800"/>
+          </a:xfrm>
+          <a:prstGeom prst="rect">
+            <a:avLst/>
+          </a:prstGeom>
+          <a:noFill/>
+          <a:ln/>
+        </p:spPr>
+        <p:txBody>
+          <a:bodyPr wrap="square" lIns="0" tIns="0" rIns="0" bIns="0" rtlCol="0" anchor="t"/>
+          <a:lstStyle/>
+          <a:p>
+            <a:pPr indent="0" marL="0">
+              <a:lnSpc>
+                <a:spcPct val="105000"/>
+              </a:lnSpc>
+              <a:buNone/>
+            </a:pPr>
+            <a:r>
+              <a:rPr lang="en-US" sz="950" b="1" dirty="0">
+                <a:solidFill>
+                  <a:srgbClr val="1E2761"/>
+                </a:solidFill>
+                <a:latin typeface="Courier New" pitchFamily="34" charset="0"/>
+                <a:ea typeface="Courier New" pitchFamily="34" charset="-122"/>
+                <a:cs typeface="Courier New" pitchFamily="34" charset="-120"/>
+              </a:rPr>
+              <a:t>Accuracy 84 % sur du 85/15</a:t>
+            </a:r>
+            <a:endParaRPr lang="en-US" sz="950" dirty="0"/>
+          </a:p>
+          <a:p>
+            <a:pPr indent="0" marL="0">
+              <a:lnSpc>
+                <a:spcPct val="105000"/>
+              </a:lnSpc>
+              <a:buNone/>
+            </a:pPr>
+            <a:r>
+              <a:rPr lang="en-US" sz="900" dirty="0">
+                <a:solidFill>
+                  <a:srgbClr val="2A3550"/>
+                </a:solidFill>
+                <a:latin typeface="Calibri" pitchFamily="34" charset="0"/>
+                <a:ea typeface="Calibri" pitchFamily="34" charset="-122"/>
+                <a:cs typeface="Calibri" pitchFamily="34" charset="-120"/>
+              </a:rPr>
+              <a:t>pire que l'idiot « toujours Deny » — baseline d'abord ! (S3_P1)</a:t>
+            </a:r>
+            <a:endParaRPr lang="en-US" sz="950" dirty="0"/>
+          </a:p>
+        </p:txBody>
+      </p:sp>
+      <p:sp>
+        <p:nvSpPr>
+          <p:cNvPr id="32" name="Shape 30"/>
+          <p:cNvSpPr/>
+          <p:nvPr/>
+        </p:nvSpPr>
+        <p:spPr>
+          <a:xfrm>
+            <a:off x="4681728" y="3931920"/>
+            <a:ext cx="4041648" cy="804672"/>
+          </a:xfrm>
+          <a:prstGeom prst="roundRect">
+            <a:avLst>
+              <a:gd name="adj" fmla="val 6818"/>
+            </a:avLst>
+          </a:prstGeom>
+          <a:solidFill>
+            <a:srgbClr val="EEF4FE"/>
+          </a:solidFill>
+          <a:ln/>
+          <a:effectLst>
+            <a:outerShdw sx="100000" sy="100000" kx="0" ky="0" algn="bl" rotWithShape="0" blurRad="88900" dist="25400" dir="2700000">
+              <a:srgbClr val="000000">
+                <a:alpha val="14000"/>
+              </a:srgbClr>
+            </a:outerShdw>
+          </a:effectLst>
+        </p:spPr>
+      </p:sp>
+      <p:sp>
+        <p:nvSpPr>
+          <p:cNvPr id="33" name="Shape 31"/>
+          <p:cNvSpPr/>
+          <p:nvPr/>
+        </p:nvSpPr>
+        <p:spPr>
+          <a:xfrm>
+            <a:off x="4791456" y="4169664"/>
+            <a:ext cx="329184" cy="329184"/>
+          </a:xfrm>
+          <a:prstGeom prst="ellipse">
+            <a:avLst/>
+          </a:prstGeom>
+          <a:solidFill>
+            <a:srgbClr val="D64550"/>
+          </a:solidFill>
+          <a:ln/>
+        </p:spPr>
+      </p:sp>
+      <p:sp>
+        <p:nvSpPr>
+          <p:cNvPr id="34" name="Text 32"/>
+          <p:cNvSpPr/>
+          <p:nvPr/>
+        </p:nvSpPr>
+        <p:spPr>
+          <a:xfrm>
+            <a:off x="4791456" y="4160520"/>
+            <a:ext cx="329184" cy="329184"/>
+          </a:xfrm>
+          <a:prstGeom prst="rect">
+            <a:avLst/>
+          </a:prstGeom>
+          <a:noFill/>
+          <a:ln/>
+        </p:spPr>
+        <p:txBody>
+          <a:bodyPr wrap="square" lIns="0" tIns="0" rIns="0" bIns="0" rtlCol="0" anchor="ctr"/>
+          <a:lstStyle/>
+          <a:p>
+            <a:pPr algn="ctr" indent="0" marL="0">
+              <a:buNone/>
+            </a:pPr>
+            <a:r>
+              <a:rPr lang="en-US" sz="1300" b="1" dirty="0">
+                <a:solidFill>
+                  <a:srgbClr val="FFFFFF"/>
+                </a:solidFill>
+                <a:latin typeface="Calibri" pitchFamily="34" charset="0"/>
+                <a:ea typeface="Calibri" pitchFamily="34" charset="-122"/>
+                <a:cs typeface="Calibri" pitchFamily="34" charset="-120"/>
+              </a:rPr>
+              <a:t>8</a:t>
+            </a:r>
+            <a:endParaRPr lang="en-US" sz="1300" dirty="0"/>
+          </a:p>
+        </p:txBody>
+      </p:sp>
+      <p:sp>
+        <p:nvSpPr>
+          <p:cNvPr id="35" name="Text 33"/>
+          <p:cNvSpPr/>
+          <p:nvPr/>
+        </p:nvSpPr>
+        <p:spPr>
+          <a:xfrm>
+            <a:off x="5230368" y="4005072"/>
+            <a:ext cx="3401568" cy="685800"/>
+          </a:xfrm>
+          <a:prstGeom prst="rect">
+            <a:avLst/>
+          </a:prstGeom>
+          <a:noFill/>
+          <a:ln/>
+        </p:spPr>
+        <p:txBody>
+          <a:bodyPr wrap="square" lIns="0" tIns="0" rIns="0" bIns="0" rtlCol="0" anchor="t"/>
+          <a:lstStyle/>
+          <a:p>
+            <a:pPr indent="0" marL="0">
+              <a:lnSpc>
+                <a:spcPct val="105000"/>
+              </a:lnSpc>
+              <a:buNone/>
+            </a:pPr>
+            <a:r>
+              <a:rPr lang="en-US" sz="950" b="1" dirty="0">
+                <a:solidFill>
+                  <a:srgbClr val="1E2761"/>
+                </a:solidFill>
+                <a:latin typeface="Courier New" pitchFamily="34" charset="0"/>
+                <a:ea typeface="Courier New" pitchFamily="34" charset="-122"/>
+                <a:cs typeface="Courier New" pitchFamily="34" charset="-120"/>
+              </a:rPr>
+              <a:t>idxmin() → indice, pas valeur</a:t>
+            </a:r>
+            <a:endParaRPr lang="en-US" sz="950" dirty="0"/>
+          </a:p>
+          <a:p>
+            <a:pPr indent="0" marL="0">
+              <a:lnSpc>
+                <a:spcPct val="105000"/>
+              </a:lnSpc>
+              <a:buNone/>
+            </a:pPr>
+            <a:r>
+              <a:rPr lang="en-US" sz="900" dirty="0">
+                <a:solidFill>
+                  <a:srgbClr val="2A3550"/>
+                </a:solidFill>
+                <a:latin typeface="Calibri" pitchFamily="34" charset="0"/>
+                <a:ea typeface="Calibri" pitchFamily="34" charset="-122"/>
+                <a:cs typeface="Calibri" pitchFamily="34" charset="-120"/>
+              </a:rPr>
+              <a:t>ligne 2 = k 3 : le meilleur k n'était pas 2 ! (S4_P1)</a:t>
+            </a:r>
+            <a:endParaRPr lang="en-US" sz="950" dirty="0"/>
+          </a:p>
+        </p:txBody>
+      </p:sp>
+    </p:spTree>
+  </p:cSld>
+  <p:clrMapOvr>
+    <a:masterClrMapping/>
+  </p:clrMapOvr>
+</p:sld>
+</file>
+
+<file path=ppt/slides/slide47.xml><?xml version="1.0" encoding="utf-8"?>
+<p:sld xmlns:a="http://schemas.openxmlformats.org/drawingml/2006/main" xmlns:r="http://schemas.openxmlformats.org/officeDocument/2006/relationships" xmlns:p="http://schemas.openxmlformats.org/presentationml/2006/main">
+  <p:cSld name="Slide 47">
     <p:bg>
       <p:bgPr>
         <a:solidFill>
